--- a/presentations/out/Транспортировка пострадавшего.pptx
+++ b/presentations/out/Транспортировка пострадавшего.pptx
@@ -15,6 +15,10 @@
     <p:sldId id="263" r:id="rId14"/>
     <p:sldId id="264" r:id="rId15"/>
     <p:sldId id="265" r:id="rId16"/>
+    <p:sldId id="266" r:id="rId17"/>
+    <p:sldId id="267" r:id="rId18"/>
+    <p:sldId id="268" r:id="rId19"/>
+    <p:sldId id="269" r:id="rId20"/>
   </p:sldIdLst>
   <p:sldSz cx="12191695" cy="6858000" type="screen4x3"/>
   <p:notesSz cx="6858000" cy="9144000"/>
@@ -3371,6 +3375,2011 @@
         <p:spPr>
           <a:xfrm>
             <a:off x="0" y="0"/>
+            <a:ext cx="12191695" cy="6858000"/>
+          </a:xfrm>
+          <a:prstGeom prst="rect">
+            <a:avLst/>
+          </a:prstGeom>
+          <a:solidFill>
+            <a:srgbClr val="FFFFFF"/>
+          </a:solidFill>
+          <a:ln>
+            <a:noFill/>
+          </a:ln>
+        </p:spPr>
+        <p:style>
+          <a:lnRef idx="1">
+            <a:schemeClr val="accent1"/>
+          </a:lnRef>
+          <a:fillRef idx="3">
+            <a:schemeClr val="accent1"/>
+          </a:fillRef>
+          <a:effectRef idx="2">
+            <a:schemeClr val="accent1"/>
+          </a:effectRef>
+          <a:fontRef idx="minor">
+            <a:schemeClr val="lt1"/>
+          </a:fontRef>
+        </p:style>
+        <p:txBody>
+          <a:bodyPr rtlCol="0" anchor="ctr"/>
+          <a:lstStyle/>
+          <a:p>
+            <a:pPr algn="ctr"/>
+          </a:p>
+        </p:txBody>
+      </p:sp>
+      <p:sp>
+        <p:nvSpPr>
+          <p:cNvPr id="3" name="TextBox 2"/>
+          <p:cNvSpPr txBox="1"/>
+          <p:nvPr/>
+        </p:nvSpPr>
+        <p:spPr>
+          <a:xfrm>
+            <a:off x="700000" y="250000"/>
+            <a:ext cx="11200000" cy="550000"/>
+          </a:xfrm>
+          <a:prstGeom prst="rect">
+            <a:avLst/>
+          </a:prstGeom>
+          <a:noFill/>
+        </p:spPr>
+        <p:txBody>
+          <a:bodyPr wrap="square" anchor="t">
+            <a:spAutoFit/>
+          </a:bodyPr>
+          <a:lstStyle/>
+          <a:p>
+            <a:pPr algn="l"/>
+            <a:r>
+              <a:rPr sz="2200" b="1">
+                <a:solidFill>
+                  <a:srgbClr val="333333"/>
+                </a:solidFill>
+                <a:latin typeface="Open Sans"/>
+                <a:ea typeface="Open Sans"/>
+                <a:cs typeface="Open Sans"/>
+              </a:rPr>
+              <a:t>НАБЛЮДЕНИЕ ВО ВРЕМЯ ТРАНСПОРТИРОВКИ</a:t>
+            </a:r>
+          </a:p>
+        </p:txBody>
+      </p:sp>
+      <p:sp>
+        <p:nvSpPr>
+          <p:cNvPr id="4" name="Rectangle 3"/>
+          <p:cNvSpPr/>
+          <p:nvPr/>
+        </p:nvSpPr>
+        <p:spPr>
+          <a:xfrm>
+            <a:off x="700000" y="850000"/>
+            <a:ext cx="9000000" cy="28000"/>
+          </a:xfrm>
+          <a:prstGeom prst="rect">
+            <a:avLst/>
+          </a:prstGeom>
+          <a:solidFill>
+            <a:srgbClr val="555555"/>
+          </a:solidFill>
+          <a:ln>
+            <a:noFill/>
+          </a:ln>
+        </p:spPr>
+        <p:style>
+          <a:lnRef idx="1">
+            <a:schemeClr val="accent1"/>
+          </a:lnRef>
+          <a:fillRef idx="3">
+            <a:schemeClr val="accent1"/>
+          </a:fillRef>
+          <a:effectRef idx="2">
+            <a:schemeClr val="accent1"/>
+          </a:effectRef>
+          <a:fontRef idx="minor">
+            <a:schemeClr val="lt1"/>
+          </a:fontRef>
+        </p:style>
+        <p:txBody>
+          <a:bodyPr rtlCol="0" anchor="ctr"/>
+          <a:lstStyle/>
+          <a:p>
+            <a:pPr algn="ctr"/>
+          </a:p>
+        </p:txBody>
+      </p:sp>
+      <p:sp>
+        <p:nvSpPr>
+          <p:cNvPr id="5" name="TextBox 4"/>
+          <p:cNvSpPr txBox="1"/>
+          <p:nvPr/>
+        </p:nvSpPr>
+        <p:spPr>
+          <a:xfrm>
+            <a:off x="700000" y="920000"/>
+            <a:ext cx="11000000" cy="350000"/>
+          </a:xfrm>
+          <a:prstGeom prst="rect">
+            <a:avLst/>
+          </a:prstGeom>
+          <a:noFill/>
+        </p:spPr>
+        <p:txBody>
+          <a:bodyPr wrap="square" anchor="t">
+            <a:spAutoFit/>
+          </a:bodyPr>
+          <a:lstStyle/>
+          <a:p>
+            <a:pPr algn="l"/>
+            <a:r>
+              <a:rPr sz="1200" b="0">
+                <a:solidFill>
+                  <a:srgbClr val="666666"/>
+                </a:solidFill>
+                <a:latin typeface="Open Sans"/>
+                <a:ea typeface="Open Sans"/>
+                <a:cs typeface="Open Sans"/>
+              </a:rPr>
+              <a:t>Оказание первой помощи при травмах, ранениях и поражениях, прочих состояниях</a:t>
+            </a:r>
+          </a:p>
+        </p:txBody>
+      </p:sp>
+      <p:sp>
+        <p:nvSpPr>
+          <p:cNvPr id="6" name="Rectangle 5"/>
+          <p:cNvSpPr/>
+          <p:nvPr/>
+        </p:nvSpPr>
+        <p:spPr>
+          <a:xfrm>
+            <a:off x="0" y="2800000"/>
+            <a:ext cx="420000" cy="420000"/>
+          </a:xfrm>
+          <a:prstGeom prst="rect">
+            <a:avLst/>
+          </a:prstGeom>
+          <a:solidFill>
+            <a:srgbClr val="555555"/>
+          </a:solidFill>
+          <a:ln>
+            <a:noFill/>
+          </a:ln>
+        </p:spPr>
+        <p:style>
+          <a:lnRef idx="1">
+            <a:schemeClr val="accent1"/>
+          </a:lnRef>
+          <a:fillRef idx="3">
+            <a:schemeClr val="accent1"/>
+          </a:fillRef>
+          <a:effectRef idx="2">
+            <a:schemeClr val="accent1"/>
+          </a:effectRef>
+          <a:fontRef idx="minor">
+            <a:schemeClr val="lt1"/>
+          </a:fontRef>
+        </p:style>
+        <p:txBody>
+          <a:bodyPr rtlCol="0" anchor="ctr"/>
+          <a:lstStyle/>
+          <a:p>
+            <a:pPr algn="ctr"/>
+          </a:p>
+        </p:txBody>
+      </p:sp>
+      <p:sp>
+        <p:nvSpPr>
+          <p:cNvPr id="7" name="TextBox 6"/>
+          <p:cNvSpPr txBox="1"/>
+          <p:nvPr/>
+        </p:nvSpPr>
+        <p:spPr>
+          <a:xfrm>
+            <a:off x="0" y="2800000"/>
+            <a:ext cx="420000" cy="420000"/>
+          </a:xfrm>
+          <a:prstGeom prst="rect">
+            <a:avLst/>
+          </a:prstGeom>
+          <a:noFill/>
+        </p:spPr>
+        <p:txBody>
+          <a:bodyPr wrap="square" anchor="ctr">
+            <a:spAutoFit/>
+          </a:bodyPr>
+          <a:lstStyle/>
+          <a:p>
+            <a:pPr algn="ctr"/>
+            <a:r>
+              <a:rPr sz="1400" b="1">
+                <a:solidFill>
+                  <a:srgbClr val="FFFFFF"/>
+                </a:solidFill>
+                <a:latin typeface="Open Sans"/>
+                <a:ea typeface="Open Sans"/>
+                <a:cs typeface="Open Sans"/>
+              </a:rPr>
+              <a:t>10</a:t>
+            </a:r>
+          </a:p>
+        </p:txBody>
+      </p:sp>
+      <p:sp>
+        <p:nvSpPr>
+          <p:cNvPr id="8" name="TextBox 7"/>
+          <p:cNvSpPr txBox="1"/>
+          <p:nvPr/>
+        </p:nvSpPr>
+        <p:spPr>
+          <a:xfrm>
+            <a:off x="700000" y="1450000"/>
+            <a:ext cx="11000000" cy="4000000"/>
+          </a:xfrm>
+          <a:prstGeom prst="rect">
+            <a:avLst/>
+          </a:prstGeom>
+          <a:noFill/>
+        </p:spPr>
+        <p:txBody>
+          <a:bodyPr wrap="square">
+            <a:spAutoFit/>
+          </a:bodyPr>
+          <a:lstStyle/>
+          <a:p>
+            <a:pPr algn="l">
+              <a:spcAft>
+                <a:spcPts val="800"/>
+              </a:spcAft>
+            </a:pPr>
+            <a:r>
+              <a:rPr sz="1400" b="0">
+                <a:solidFill>
+                  <a:srgbClr val="333333"/>
+                </a:solidFill>
+                <a:latin typeface="Open Sans"/>
+                <a:ea typeface="Open Sans"/>
+                <a:cs typeface="Open Sans"/>
+              </a:rPr>
+              <a:t>•  Пострадавший должен находиться под постоянным наблюдением сопровождающего.</a:t>
+            </a:r>
+          </a:p>
+          <a:p>
+            <a:pPr algn="l">
+              <a:spcAft>
+                <a:spcPts val="800"/>
+              </a:spcAft>
+            </a:pPr>
+            <a:r>
+              <a:rPr sz="1400" b="0">
+                <a:solidFill>
+                  <a:srgbClr val="333333"/>
+                </a:solidFill>
+                <a:latin typeface="Open Sans"/>
+                <a:ea typeface="Open Sans"/>
+                <a:cs typeface="Open Sans"/>
+              </a:rPr>
+              <a:t>•  Регулярно проверяйте сознание, дыхание и цвет кожи.</a:t>
+            </a:r>
+          </a:p>
+          <a:p>
+            <a:pPr algn="l">
+              <a:spcAft>
+                <a:spcPts val="800"/>
+              </a:spcAft>
+            </a:pPr>
+            <a:r>
+              <a:rPr sz="1400" b="0">
+                <a:solidFill>
+                  <a:srgbClr val="333333"/>
+                </a:solidFill>
+                <a:latin typeface="Open Sans"/>
+                <a:ea typeface="Open Sans"/>
+                <a:cs typeface="Open Sans"/>
+              </a:rPr>
+              <a:t>•  Следите за болью, тошнотой, слабостью и новыми жалобами.</a:t>
+            </a:r>
+          </a:p>
+          <a:p>
+            <a:pPr algn="l">
+              <a:spcAft>
+                <a:spcPts val="800"/>
+              </a:spcAft>
+            </a:pPr>
+            <a:r>
+              <a:rPr sz="1400" b="1">
+                <a:solidFill>
+                  <a:srgbClr val="CC0000"/>
+                </a:solidFill>
+                <a:latin typeface="Open Sans"/>
+                <a:ea typeface="Open Sans"/>
+                <a:cs typeface="Open Sans"/>
+              </a:rPr>
+              <a:t>•  При резком ухудшении остановитесь в безопасном месте.</a:t>
+            </a:r>
+          </a:p>
+          <a:p>
+            <a:pPr algn="l">
+              <a:spcAft>
+                <a:spcPts val="800"/>
+              </a:spcAft>
+            </a:pPr>
+            <a:r>
+              <a:rPr sz="1400" b="1">
+                <a:solidFill>
+                  <a:srgbClr val="CC0000"/>
+                </a:solidFill>
+                <a:latin typeface="Open Sans"/>
+                <a:ea typeface="Open Sans"/>
+                <a:cs typeface="Open Sans"/>
+              </a:rPr>
+              <a:t>•  Снова вызовите скорую помощь и будьте готовы начать реанимацию.</a:t>
+            </a:r>
+          </a:p>
+        </p:txBody>
+      </p:sp>
+      <p:sp>
+        <p:nvSpPr>
+          <p:cNvPr id="9" name="Rounded Rectangle 8"/>
+          <p:cNvSpPr/>
+          <p:nvPr/>
+        </p:nvSpPr>
+        <p:spPr>
+          <a:xfrm>
+            <a:off x="700000" y="5600000"/>
+            <a:ext cx="11000000" cy="1000000"/>
+          </a:xfrm>
+          <a:prstGeom prst="roundRect">
+            <a:avLst/>
+          </a:prstGeom>
+          <a:solidFill>
+            <a:srgbClr val="F5F0E1"/>
+          </a:solidFill>
+          <a:ln>
+            <a:noFill/>
+          </a:ln>
+        </p:spPr>
+        <p:style>
+          <a:lnRef idx="1">
+            <a:schemeClr val="accent1"/>
+          </a:lnRef>
+          <a:fillRef idx="3">
+            <a:schemeClr val="accent1"/>
+          </a:fillRef>
+          <a:effectRef idx="2">
+            <a:schemeClr val="accent1"/>
+          </a:effectRef>
+          <a:fontRef idx="minor">
+            <a:schemeClr val="lt1"/>
+          </a:fontRef>
+        </p:style>
+        <p:txBody>
+          <a:bodyPr rtlCol="0" anchor="ctr"/>
+          <a:lstStyle/>
+          <a:p>
+            <a:pPr algn="ctr"/>
+          </a:p>
+        </p:txBody>
+      </p:sp>
+      <p:sp>
+        <p:nvSpPr>
+          <p:cNvPr id="10" name="TextBox 9"/>
+          <p:cNvSpPr txBox="1"/>
+          <p:nvPr/>
+        </p:nvSpPr>
+        <p:spPr>
+          <a:xfrm>
+            <a:off x="950000" y="5800000"/>
+            <a:ext cx="10500000" cy="600000"/>
+          </a:xfrm>
+          <a:prstGeom prst="rect">
+            <a:avLst/>
+          </a:prstGeom>
+          <a:noFill/>
+        </p:spPr>
+        <p:txBody>
+          <a:bodyPr wrap="square" anchor="ctr">
+            <a:spAutoFit/>
+          </a:bodyPr>
+          <a:lstStyle/>
+          <a:p>
+            <a:pPr algn="l"/>
+            <a:r>
+              <a:rPr sz="1200" b="0">
+                <a:solidFill>
+                  <a:srgbClr val="333333"/>
+                </a:solidFill>
+                <a:latin typeface="Open Sans"/>
+                <a:ea typeface="Open Sans"/>
+                <a:cs typeface="Open Sans"/>
+              </a:rPr>
+              <a:t>Водитель не должен одновременно наблюдать за пострадавшим; по возможности необходим отдельный сопровождающий.</a:t>
+            </a:r>
+          </a:p>
+        </p:txBody>
+      </p:sp>
+    </p:spTree>
+  </p:cSld>
+  <p:clrMapOvr>
+    <a:masterClrMapping/>
+  </p:clrMapOvr>
+</p:sld>
+</file>
+
+<file path=ppt/slides/slide11.xml><?xml version="1.0" encoding="utf-8"?>
+<p:sld xmlns:a="http://schemas.openxmlformats.org/drawingml/2006/main" xmlns:p="http://schemas.openxmlformats.org/presentationml/2006/main" xmlns:r="http://schemas.openxmlformats.org/officeDocument/2006/relationships">
+  <p:cSld>
+    <p:spTree>
+      <p:nvGrpSpPr>
+        <p:cNvPr id="1" name=""/>
+        <p:cNvGrpSpPr/>
+        <p:nvPr/>
+      </p:nvGrpSpPr>
+      <p:grpSpPr/>
+      <p:sp>
+        <p:nvSpPr>
+          <p:cNvPr id="2" name="Rectangle 1"/>
+          <p:cNvSpPr/>
+          <p:nvPr/>
+        </p:nvSpPr>
+        <p:spPr>
+          <a:xfrm>
+            <a:off x="0" y="0"/>
+            <a:ext cx="12191695" cy="6858000"/>
+          </a:xfrm>
+          <a:prstGeom prst="rect">
+            <a:avLst/>
+          </a:prstGeom>
+          <a:solidFill>
+            <a:srgbClr val="FFFFFF"/>
+          </a:solidFill>
+          <a:ln>
+            <a:noFill/>
+          </a:ln>
+        </p:spPr>
+        <p:style>
+          <a:lnRef idx="1">
+            <a:schemeClr val="accent1"/>
+          </a:lnRef>
+          <a:fillRef idx="3">
+            <a:schemeClr val="accent1"/>
+          </a:fillRef>
+          <a:effectRef idx="2">
+            <a:schemeClr val="accent1"/>
+          </a:effectRef>
+          <a:fontRef idx="minor">
+            <a:schemeClr val="lt1"/>
+          </a:fontRef>
+        </p:style>
+        <p:txBody>
+          <a:bodyPr rtlCol="0" anchor="ctr"/>
+          <a:lstStyle/>
+          <a:p>
+            <a:pPr algn="ctr"/>
+          </a:p>
+        </p:txBody>
+      </p:sp>
+      <p:sp>
+        <p:nvSpPr>
+          <p:cNvPr id="3" name="TextBox 2"/>
+          <p:cNvSpPr txBox="1"/>
+          <p:nvPr/>
+        </p:nvSpPr>
+        <p:spPr>
+          <a:xfrm>
+            <a:off x="700000" y="250000"/>
+            <a:ext cx="11200000" cy="550000"/>
+          </a:xfrm>
+          <a:prstGeom prst="rect">
+            <a:avLst/>
+          </a:prstGeom>
+          <a:noFill/>
+        </p:spPr>
+        <p:txBody>
+          <a:bodyPr wrap="square" anchor="t">
+            <a:spAutoFit/>
+          </a:bodyPr>
+          <a:lstStyle/>
+          <a:p>
+            <a:pPr algn="l"/>
+            <a:r>
+              <a:rPr sz="2200" b="1">
+                <a:solidFill>
+                  <a:srgbClr val="333333"/>
+                </a:solidFill>
+                <a:latin typeface="Open Sans"/>
+                <a:ea typeface="Open Sans"/>
+                <a:cs typeface="Open Sans"/>
+              </a:rPr>
+              <a:t>ПРИБЫТИЕ В МЕДИЦИНСКУЮ ОРГАНИЗАЦИЮ</a:t>
+            </a:r>
+          </a:p>
+        </p:txBody>
+      </p:sp>
+      <p:sp>
+        <p:nvSpPr>
+          <p:cNvPr id="4" name="Rectangle 3"/>
+          <p:cNvSpPr/>
+          <p:nvPr/>
+        </p:nvSpPr>
+        <p:spPr>
+          <a:xfrm>
+            <a:off x="700000" y="850000"/>
+            <a:ext cx="9000000" cy="28000"/>
+          </a:xfrm>
+          <a:prstGeom prst="rect">
+            <a:avLst/>
+          </a:prstGeom>
+          <a:solidFill>
+            <a:srgbClr val="555555"/>
+          </a:solidFill>
+          <a:ln>
+            <a:noFill/>
+          </a:ln>
+        </p:spPr>
+        <p:style>
+          <a:lnRef idx="1">
+            <a:schemeClr val="accent1"/>
+          </a:lnRef>
+          <a:fillRef idx="3">
+            <a:schemeClr val="accent1"/>
+          </a:fillRef>
+          <a:effectRef idx="2">
+            <a:schemeClr val="accent1"/>
+          </a:effectRef>
+          <a:fontRef idx="minor">
+            <a:schemeClr val="lt1"/>
+          </a:fontRef>
+        </p:style>
+        <p:txBody>
+          <a:bodyPr rtlCol="0" anchor="ctr"/>
+          <a:lstStyle/>
+          <a:p>
+            <a:pPr algn="ctr"/>
+          </a:p>
+        </p:txBody>
+      </p:sp>
+      <p:sp>
+        <p:nvSpPr>
+          <p:cNvPr id="5" name="TextBox 4"/>
+          <p:cNvSpPr txBox="1"/>
+          <p:nvPr/>
+        </p:nvSpPr>
+        <p:spPr>
+          <a:xfrm>
+            <a:off x="700000" y="920000"/>
+            <a:ext cx="11000000" cy="350000"/>
+          </a:xfrm>
+          <a:prstGeom prst="rect">
+            <a:avLst/>
+          </a:prstGeom>
+          <a:noFill/>
+        </p:spPr>
+        <p:txBody>
+          <a:bodyPr wrap="square" anchor="t">
+            <a:spAutoFit/>
+          </a:bodyPr>
+          <a:lstStyle/>
+          <a:p>
+            <a:pPr algn="l"/>
+            <a:r>
+              <a:rPr sz="1200" b="0">
+                <a:solidFill>
+                  <a:srgbClr val="666666"/>
+                </a:solidFill>
+                <a:latin typeface="Open Sans"/>
+                <a:ea typeface="Open Sans"/>
+                <a:cs typeface="Open Sans"/>
+              </a:rPr>
+              <a:t>Оказание первой помощи при травмах, ранениях и поражениях, прочих состояниях</a:t>
+            </a:r>
+          </a:p>
+        </p:txBody>
+      </p:sp>
+      <p:sp>
+        <p:nvSpPr>
+          <p:cNvPr id="6" name="Rectangle 5"/>
+          <p:cNvSpPr/>
+          <p:nvPr/>
+        </p:nvSpPr>
+        <p:spPr>
+          <a:xfrm>
+            <a:off x="0" y="2800000"/>
+            <a:ext cx="420000" cy="420000"/>
+          </a:xfrm>
+          <a:prstGeom prst="rect">
+            <a:avLst/>
+          </a:prstGeom>
+          <a:solidFill>
+            <a:srgbClr val="555555"/>
+          </a:solidFill>
+          <a:ln>
+            <a:noFill/>
+          </a:ln>
+        </p:spPr>
+        <p:style>
+          <a:lnRef idx="1">
+            <a:schemeClr val="accent1"/>
+          </a:lnRef>
+          <a:fillRef idx="3">
+            <a:schemeClr val="accent1"/>
+          </a:fillRef>
+          <a:effectRef idx="2">
+            <a:schemeClr val="accent1"/>
+          </a:effectRef>
+          <a:fontRef idx="minor">
+            <a:schemeClr val="lt1"/>
+          </a:fontRef>
+        </p:style>
+        <p:txBody>
+          <a:bodyPr rtlCol="0" anchor="ctr"/>
+          <a:lstStyle/>
+          <a:p>
+            <a:pPr algn="ctr"/>
+          </a:p>
+        </p:txBody>
+      </p:sp>
+      <p:sp>
+        <p:nvSpPr>
+          <p:cNvPr id="7" name="TextBox 6"/>
+          <p:cNvSpPr txBox="1"/>
+          <p:nvPr/>
+        </p:nvSpPr>
+        <p:spPr>
+          <a:xfrm>
+            <a:off x="0" y="2800000"/>
+            <a:ext cx="420000" cy="420000"/>
+          </a:xfrm>
+          <a:prstGeom prst="rect">
+            <a:avLst/>
+          </a:prstGeom>
+          <a:noFill/>
+        </p:spPr>
+        <p:txBody>
+          <a:bodyPr wrap="square" anchor="ctr">
+            <a:spAutoFit/>
+          </a:bodyPr>
+          <a:lstStyle/>
+          <a:p>
+            <a:pPr algn="ctr"/>
+            <a:r>
+              <a:rPr sz="1400" b="1">
+                <a:solidFill>
+                  <a:srgbClr val="FFFFFF"/>
+                </a:solidFill>
+                <a:latin typeface="Open Sans"/>
+                <a:ea typeface="Open Sans"/>
+                <a:cs typeface="Open Sans"/>
+              </a:rPr>
+              <a:t>11</a:t>
+            </a:r>
+          </a:p>
+        </p:txBody>
+      </p:sp>
+      <p:sp>
+        <p:nvSpPr>
+          <p:cNvPr id="8" name="TextBox 7"/>
+          <p:cNvSpPr txBox="1"/>
+          <p:nvPr/>
+        </p:nvSpPr>
+        <p:spPr>
+          <a:xfrm>
+            <a:off x="700000" y="1450000"/>
+            <a:ext cx="11000000" cy="4000000"/>
+          </a:xfrm>
+          <a:prstGeom prst="rect">
+            <a:avLst/>
+          </a:prstGeom>
+          <a:noFill/>
+        </p:spPr>
+        <p:txBody>
+          <a:bodyPr wrap="square">
+            <a:spAutoFit/>
+          </a:bodyPr>
+          <a:lstStyle/>
+          <a:p>
+            <a:pPr algn="l">
+              <a:spcAft>
+                <a:spcPts val="800"/>
+              </a:spcAft>
+            </a:pPr>
+            <a:r>
+              <a:rPr sz="1400" b="0">
+                <a:solidFill>
+                  <a:srgbClr val="333333"/>
+                </a:solidFill>
+                <a:latin typeface="Open Sans"/>
+                <a:ea typeface="Open Sans"/>
+                <a:cs typeface="Open Sans"/>
+              </a:rPr>
+              <a:t>•  Сообщите персоналу о прибытии пострадавшего и не оставляйте его одного.</a:t>
+            </a:r>
+          </a:p>
+          <a:p>
+            <a:pPr algn="l">
+              <a:spcAft>
+                <a:spcPts val="800"/>
+              </a:spcAft>
+            </a:pPr>
+            <a:r>
+              <a:rPr sz="1400" b="0">
+                <a:solidFill>
+                  <a:srgbClr val="333333"/>
+                </a:solidFill>
+                <a:latin typeface="Open Sans"/>
+                <a:ea typeface="Open Sans"/>
+                <a:cs typeface="Open Sans"/>
+              </a:rPr>
+              <a:t>•  Передайте обстоятельства происшествия и первоначальное состояние.</a:t>
+            </a:r>
+          </a:p>
+          <a:p>
+            <a:pPr algn="l">
+              <a:spcAft>
+                <a:spcPts val="800"/>
+              </a:spcAft>
+            </a:pPr>
+            <a:r>
+              <a:rPr sz="1400" b="0">
+                <a:solidFill>
+                  <a:srgbClr val="333333"/>
+                </a:solidFill>
+                <a:latin typeface="Open Sans"/>
+                <a:ea typeface="Open Sans"/>
+                <a:cs typeface="Open Sans"/>
+              </a:rPr>
+              <a:t>•  Перечислите найденные травмы и выполненные действия.</a:t>
+            </a:r>
+          </a:p>
+          <a:p>
+            <a:pPr algn="l">
+              <a:spcAft>
+                <a:spcPts val="800"/>
+              </a:spcAft>
+            </a:pPr>
+            <a:r>
+              <a:rPr sz="1400" b="0">
+                <a:solidFill>
+                  <a:srgbClr val="333333"/>
+                </a:solidFill>
+                <a:latin typeface="Open Sans"/>
+                <a:ea typeface="Open Sans"/>
+                <a:cs typeface="Open Sans"/>
+              </a:rPr>
+              <a:t>•  Назовите время наложения жгута, приема лекарства и изменений состояния.</a:t>
+            </a:r>
+          </a:p>
+          <a:p>
+            <a:pPr algn="l">
+              <a:spcAft>
+                <a:spcPts val="800"/>
+              </a:spcAft>
+            </a:pPr>
+            <a:r>
+              <a:rPr sz="1400" b="0">
+                <a:solidFill>
+                  <a:srgbClr val="333333"/>
+                </a:solidFill>
+                <a:latin typeface="Open Sans"/>
+                <a:ea typeface="Open Sans"/>
+                <a:cs typeface="Open Sans"/>
+              </a:rPr>
+              <a:t>•  Передайте упаковки веществ, лекарства и документы.</a:t>
+            </a:r>
+          </a:p>
+          <a:p>
+            <a:pPr algn="l">
+              <a:spcAft>
+                <a:spcPts val="800"/>
+              </a:spcAft>
+            </a:pPr>
+            <a:r>
+              <a:rPr sz="1400" b="0">
+                <a:solidFill>
+                  <a:srgbClr val="333333"/>
+                </a:solidFill>
+                <a:latin typeface="Open Sans"/>
+                <a:ea typeface="Open Sans"/>
+                <a:cs typeface="Open Sans"/>
+              </a:rPr>
+              <a:t>•  Помогайте переносить только по указанию медицинских работников.</a:t>
+            </a:r>
+          </a:p>
+        </p:txBody>
+      </p:sp>
+    </p:spTree>
+  </p:cSld>
+  <p:clrMapOvr>
+    <a:masterClrMapping/>
+  </p:clrMapOvr>
+</p:sld>
+</file>
+
+<file path=ppt/slides/slide12.xml><?xml version="1.0" encoding="utf-8"?>
+<p:sld xmlns:a="http://schemas.openxmlformats.org/drawingml/2006/main" xmlns:p="http://schemas.openxmlformats.org/presentationml/2006/main" xmlns:r="http://schemas.openxmlformats.org/officeDocument/2006/relationships">
+  <p:cSld>
+    <p:spTree>
+      <p:nvGrpSpPr>
+        <p:cNvPr id="1" name=""/>
+        <p:cNvGrpSpPr/>
+        <p:nvPr/>
+      </p:nvGrpSpPr>
+      <p:grpSpPr/>
+      <p:sp>
+        <p:nvSpPr>
+          <p:cNvPr id="2" name="Rectangle 1"/>
+          <p:cNvSpPr/>
+          <p:nvPr/>
+        </p:nvSpPr>
+        <p:spPr>
+          <a:xfrm>
+            <a:off x="0" y="0"/>
+            <a:ext cx="12191695" cy="6858000"/>
+          </a:xfrm>
+          <a:prstGeom prst="rect">
+            <a:avLst/>
+          </a:prstGeom>
+          <a:solidFill>
+            <a:srgbClr val="FFFFFF"/>
+          </a:solidFill>
+          <a:ln>
+            <a:noFill/>
+          </a:ln>
+        </p:spPr>
+        <p:style>
+          <a:lnRef idx="1">
+            <a:schemeClr val="accent1"/>
+          </a:lnRef>
+          <a:fillRef idx="3">
+            <a:schemeClr val="accent1"/>
+          </a:fillRef>
+          <a:effectRef idx="2">
+            <a:schemeClr val="accent1"/>
+          </a:effectRef>
+          <a:fontRef idx="minor">
+            <a:schemeClr val="lt1"/>
+          </a:fontRef>
+        </p:style>
+        <p:txBody>
+          <a:bodyPr rtlCol="0" anchor="ctr"/>
+          <a:lstStyle/>
+          <a:p>
+            <a:pPr algn="ctr"/>
+          </a:p>
+        </p:txBody>
+      </p:sp>
+      <p:sp>
+        <p:nvSpPr>
+          <p:cNvPr id="3" name="TextBox 2"/>
+          <p:cNvSpPr txBox="1"/>
+          <p:nvPr/>
+        </p:nvSpPr>
+        <p:spPr>
+          <a:xfrm>
+            <a:off x="700000" y="250000"/>
+            <a:ext cx="11200000" cy="550000"/>
+          </a:xfrm>
+          <a:prstGeom prst="rect">
+            <a:avLst/>
+          </a:prstGeom>
+          <a:noFill/>
+        </p:spPr>
+        <p:txBody>
+          <a:bodyPr wrap="square" anchor="t">
+            <a:spAutoFit/>
+          </a:bodyPr>
+          <a:lstStyle/>
+          <a:p>
+            <a:pPr algn="l"/>
+            <a:r>
+              <a:rPr sz="2200" b="1">
+                <a:solidFill>
+                  <a:srgbClr val="333333"/>
+                </a:solidFill>
+                <a:latin typeface="Open Sans"/>
+                <a:ea typeface="Open Sans"/>
+                <a:cs typeface="Open Sans"/>
+              </a:rPr>
+              <a:t>ГЛАВНОЕ ЗАПОМНИТЬ</a:t>
+            </a:r>
+          </a:p>
+        </p:txBody>
+      </p:sp>
+      <p:sp>
+        <p:nvSpPr>
+          <p:cNvPr id="4" name="Rectangle 3"/>
+          <p:cNvSpPr/>
+          <p:nvPr/>
+        </p:nvSpPr>
+        <p:spPr>
+          <a:xfrm>
+            <a:off x="700000" y="850000"/>
+            <a:ext cx="9000000" cy="28000"/>
+          </a:xfrm>
+          <a:prstGeom prst="rect">
+            <a:avLst/>
+          </a:prstGeom>
+          <a:solidFill>
+            <a:srgbClr val="555555"/>
+          </a:solidFill>
+          <a:ln>
+            <a:noFill/>
+          </a:ln>
+        </p:spPr>
+        <p:style>
+          <a:lnRef idx="1">
+            <a:schemeClr val="accent1"/>
+          </a:lnRef>
+          <a:fillRef idx="3">
+            <a:schemeClr val="accent1"/>
+          </a:fillRef>
+          <a:effectRef idx="2">
+            <a:schemeClr val="accent1"/>
+          </a:effectRef>
+          <a:fontRef idx="minor">
+            <a:schemeClr val="lt1"/>
+          </a:fontRef>
+        </p:style>
+        <p:txBody>
+          <a:bodyPr rtlCol="0" anchor="ctr"/>
+          <a:lstStyle/>
+          <a:p>
+            <a:pPr algn="ctr"/>
+          </a:p>
+        </p:txBody>
+      </p:sp>
+      <p:sp>
+        <p:nvSpPr>
+          <p:cNvPr id="5" name="TextBox 4"/>
+          <p:cNvSpPr txBox="1"/>
+          <p:nvPr/>
+        </p:nvSpPr>
+        <p:spPr>
+          <a:xfrm>
+            <a:off x="700000" y="920000"/>
+            <a:ext cx="11000000" cy="350000"/>
+          </a:xfrm>
+          <a:prstGeom prst="rect">
+            <a:avLst/>
+          </a:prstGeom>
+          <a:noFill/>
+        </p:spPr>
+        <p:txBody>
+          <a:bodyPr wrap="square" anchor="t">
+            <a:spAutoFit/>
+          </a:bodyPr>
+          <a:lstStyle/>
+          <a:p>
+            <a:pPr algn="l"/>
+            <a:r>
+              <a:rPr sz="1200" b="0">
+                <a:solidFill>
+                  <a:srgbClr val="666666"/>
+                </a:solidFill>
+                <a:latin typeface="Open Sans"/>
+                <a:ea typeface="Open Sans"/>
+                <a:cs typeface="Open Sans"/>
+              </a:rPr>
+              <a:t>Оказание первой помощи при травмах, ранениях и поражениях, прочих состояниях</a:t>
+            </a:r>
+          </a:p>
+        </p:txBody>
+      </p:sp>
+      <p:sp>
+        <p:nvSpPr>
+          <p:cNvPr id="6" name="Rectangle 5"/>
+          <p:cNvSpPr/>
+          <p:nvPr/>
+        </p:nvSpPr>
+        <p:spPr>
+          <a:xfrm>
+            <a:off x="0" y="2800000"/>
+            <a:ext cx="420000" cy="420000"/>
+          </a:xfrm>
+          <a:prstGeom prst="rect">
+            <a:avLst/>
+          </a:prstGeom>
+          <a:solidFill>
+            <a:srgbClr val="555555"/>
+          </a:solidFill>
+          <a:ln>
+            <a:noFill/>
+          </a:ln>
+        </p:spPr>
+        <p:style>
+          <a:lnRef idx="1">
+            <a:schemeClr val="accent1"/>
+          </a:lnRef>
+          <a:fillRef idx="3">
+            <a:schemeClr val="accent1"/>
+          </a:fillRef>
+          <a:effectRef idx="2">
+            <a:schemeClr val="accent1"/>
+          </a:effectRef>
+          <a:fontRef idx="minor">
+            <a:schemeClr val="lt1"/>
+          </a:fontRef>
+        </p:style>
+        <p:txBody>
+          <a:bodyPr rtlCol="0" anchor="ctr"/>
+          <a:lstStyle/>
+          <a:p>
+            <a:pPr algn="ctr"/>
+          </a:p>
+        </p:txBody>
+      </p:sp>
+      <p:sp>
+        <p:nvSpPr>
+          <p:cNvPr id="7" name="TextBox 6"/>
+          <p:cNvSpPr txBox="1"/>
+          <p:nvPr/>
+        </p:nvSpPr>
+        <p:spPr>
+          <a:xfrm>
+            <a:off x="0" y="2800000"/>
+            <a:ext cx="420000" cy="420000"/>
+          </a:xfrm>
+          <a:prstGeom prst="rect">
+            <a:avLst/>
+          </a:prstGeom>
+          <a:noFill/>
+        </p:spPr>
+        <p:txBody>
+          <a:bodyPr wrap="square" anchor="ctr">
+            <a:spAutoFit/>
+          </a:bodyPr>
+          <a:lstStyle/>
+          <a:p>
+            <a:pPr algn="ctr"/>
+            <a:r>
+              <a:rPr sz="1400" b="1">
+                <a:solidFill>
+                  <a:srgbClr val="FFFFFF"/>
+                </a:solidFill>
+                <a:latin typeface="Open Sans"/>
+                <a:ea typeface="Open Sans"/>
+                <a:cs typeface="Open Sans"/>
+              </a:rPr>
+              <a:t>12</a:t>
+            </a:r>
+          </a:p>
+        </p:txBody>
+      </p:sp>
+      <p:sp>
+        <p:nvSpPr>
+          <p:cNvPr id="8" name="Rectangle 7"/>
+          <p:cNvSpPr/>
+          <p:nvPr/>
+        </p:nvSpPr>
+        <p:spPr>
+          <a:xfrm>
+            <a:off x="700000" y="1450000"/>
+            <a:ext cx="11000000" cy="850000"/>
+          </a:xfrm>
+          <a:prstGeom prst="rect">
+            <a:avLst/>
+          </a:prstGeom>
+          <a:solidFill>
+            <a:srgbClr val="FFFFFF"/>
+          </a:solidFill>
+          <a:ln w="12700">
+            <a:solidFill>
+              <a:srgbClr val="999999"/>
+            </a:solidFill>
+          </a:ln>
+        </p:spPr>
+        <p:style>
+          <a:lnRef idx="1">
+            <a:schemeClr val="accent1"/>
+          </a:lnRef>
+          <a:fillRef idx="3">
+            <a:schemeClr val="accent1"/>
+          </a:fillRef>
+          <a:effectRef idx="2">
+            <a:schemeClr val="accent1"/>
+          </a:effectRef>
+          <a:fontRef idx="minor">
+            <a:schemeClr val="lt1"/>
+          </a:fontRef>
+        </p:style>
+        <p:txBody>
+          <a:bodyPr rtlCol="0" anchor="ctr"/>
+          <a:lstStyle/>
+          <a:p>
+            <a:pPr algn="ctr"/>
+          </a:p>
+        </p:txBody>
+      </p:sp>
+      <p:sp>
+        <p:nvSpPr>
+          <p:cNvPr id="9" name="Rectangle 8"/>
+          <p:cNvSpPr/>
+          <p:nvPr/>
+        </p:nvSpPr>
+        <p:spPr>
+          <a:xfrm>
+            <a:off x="700000" y="1450000"/>
+            <a:ext cx="90000" cy="850000"/>
+          </a:xfrm>
+          <a:prstGeom prst="rect">
+            <a:avLst/>
+          </a:prstGeom>
+          <a:solidFill>
+            <a:srgbClr val="CC0000"/>
+          </a:solidFill>
+          <a:ln>
+            <a:noFill/>
+          </a:ln>
+        </p:spPr>
+        <p:style>
+          <a:lnRef idx="1">
+            <a:schemeClr val="accent1"/>
+          </a:lnRef>
+          <a:fillRef idx="3">
+            <a:schemeClr val="accent1"/>
+          </a:fillRef>
+          <a:effectRef idx="2">
+            <a:schemeClr val="accent1"/>
+          </a:effectRef>
+          <a:fontRef idx="minor">
+            <a:schemeClr val="lt1"/>
+          </a:fontRef>
+        </p:style>
+        <p:txBody>
+          <a:bodyPr rtlCol="0" anchor="ctr"/>
+          <a:lstStyle/>
+          <a:p>
+            <a:pPr algn="ctr"/>
+          </a:p>
+        </p:txBody>
+      </p:sp>
+      <p:sp>
+        <p:nvSpPr>
+          <p:cNvPr id="10" name="TextBox 9"/>
+          <p:cNvSpPr txBox="1"/>
+          <p:nvPr/>
+        </p:nvSpPr>
+        <p:spPr>
+          <a:xfrm>
+            <a:off x="1000000" y="1530000"/>
+            <a:ext cx="10400000" cy="690000"/>
+          </a:xfrm>
+          <a:prstGeom prst="rect">
+            <a:avLst/>
+          </a:prstGeom>
+          <a:noFill/>
+        </p:spPr>
+        <p:txBody>
+          <a:bodyPr wrap="square" anchor="ctr">
+            <a:spAutoFit/>
+          </a:bodyPr>
+          <a:lstStyle/>
+          <a:p>
+            <a:pPr algn="l"/>
+            <a:r>
+              <a:rPr sz="1300" b="0">
+                <a:solidFill>
+                  <a:srgbClr val="333333"/>
+                </a:solidFill>
+                <a:latin typeface="Open Sans"/>
+                <a:ea typeface="Open Sans"/>
+                <a:cs typeface="Open Sans"/>
+              </a:rPr>
+              <a:t>Предпочтительно дождаться бригады скорой помощи</a:t>
+            </a:r>
+          </a:p>
+        </p:txBody>
+      </p:sp>
+      <p:sp>
+        <p:nvSpPr>
+          <p:cNvPr id="11" name="Rectangle 10"/>
+          <p:cNvSpPr/>
+          <p:nvPr/>
+        </p:nvSpPr>
+        <p:spPr>
+          <a:xfrm>
+            <a:off x="700000" y="2380000"/>
+            <a:ext cx="11000000" cy="850000"/>
+          </a:xfrm>
+          <a:prstGeom prst="rect">
+            <a:avLst/>
+          </a:prstGeom>
+          <a:solidFill>
+            <a:srgbClr val="FFFFFF"/>
+          </a:solidFill>
+          <a:ln w="12700">
+            <a:solidFill>
+              <a:srgbClr val="999999"/>
+            </a:solidFill>
+          </a:ln>
+        </p:spPr>
+        <p:style>
+          <a:lnRef idx="1">
+            <a:schemeClr val="accent1"/>
+          </a:lnRef>
+          <a:fillRef idx="3">
+            <a:schemeClr val="accent1"/>
+          </a:fillRef>
+          <a:effectRef idx="2">
+            <a:schemeClr val="accent1"/>
+          </a:effectRef>
+          <a:fontRef idx="minor">
+            <a:schemeClr val="lt1"/>
+          </a:fontRef>
+        </p:style>
+        <p:txBody>
+          <a:bodyPr rtlCol="0" anchor="ctr"/>
+          <a:lstStyle/>
+          <a:p>
+            <a:pPr algn="ctr"/>
+          </a:p>
+        </p:txBody>
+      </p:sp>
+      <p:sp>
+        <p:nvSpPr>
+          <p:cNvPr id="12" name="Rectangle 11"/>
+          <p:cNvSpPr/>
+          <p:nvPr/>
+        </p:nvSpPr>
+        <p:spPr>
+          <a:xfrm>
+            <a:off x="700000" y="2380000"/>
+            <a:ext cx="90000" cy="850000"/>
+          </a:xfrm>
+          <a:prstGeom prst="rect">
+            <a:avLst/>
+          </a:prstGeom>
+          <a:solidFill>
+            <a:srgbClr val="CC0000"/>
+          </a:solidFill>
+          <a:ln>
+            <a:noFill/>
+          </a:ln>
+        </p:spPr>
+        <p:style>
+          <a:lnRef idx="1">
+            <a:schemeClr val="accent1"/>
+          </a:lnRef>
+          <a:fillRef idx="3">
+            <a:schemeClr val="accent1"/>
+          </a:fillRef>
+          <a:effectRef idx="2">
+            <a:schemeClr val="accent1"/>
+          </a:effectRef>
+          <a:fontRef idx="minor">
+            <a:schemeClr val="lt1"/>
+          </a:fontRef>
+        </p:style>
+        <p:txBody>
+          <a:bodyPr rtlCol="0" anchor="ctr"/>
+          <a:lstStyle/>
+          <a:p>
+            <a:pPr algn="ctr"/>
+          </a:p>
+        </p:txBody>
+      </p:sp>
+      <p:sp>
+        <p:nvSpPr>
+          <p:cNvPr id="13" name="TextBox 12"/>
+          <p:cNvSpPr txBox="1"/>
+          <p:nvPr/>
+        </p:nvSpPr>
+        <p:spPr>
+          <a:xfrm>
+            <a:off x="1000000" y="2460000"/>
+            <a:ext cx="10400000" cy="690000"/>
+          </a:xfrm>
+          <a:prstGeom prst="rect">
+            <a:avLst/>
+          </a:prstGeom>
+          <a:noFill/>
+        </p:spPr>
+        <p:txBody>
+          <a:bodyPr wrap="square" anchor="ctr">
+            <a:spAutoFit/>
+          </a:bodyPr>
+          <a:lstStyle/>
+          <a:p>
+            <a:pPr algn="l"/>
+            <a:r>
+              <a:rPr sz="1300" b="0">
+                <a:solidFill>
+                  <a:srgbClr val="333333"/>
+                </a:solidFill>
+                <a:latin typeface="Open Sans"/>
+                <a:ea typeface="Open Sans"/>
+                <a:cs typeface="Open Sans"/>
+              </a:rPr>
+              <a:t>Тяжело травмированного без необходимости не перемещают</a:t>
+            </a:r>
+          </a:p>
+        </p:txBody>
+      </p:sp>
+      <p:sp>
+        <p:nvSpPr>
+          <p:cNvPr id="14" name="Rectangle 13"/>
+          <p:cNvSpPr/>
+          <p:nvPr/>
+        </p:nvSpPr>
+        <p:spPr>
+          <a:xfrm>
+            <a:off x="700000" y="3310000"/>
+            <a:ext cx="11000000" cy="850000"/>
+          </a:xfrm>
+          <a:prstGeom prst="rect">
+            <a:avLst/>
+          </a:prstGeom>
+          <a:solidFill>
+            <a:srgbClr val="FFFFFF"/>
+          </a:solidFill>
+          <a:ln w="12700">
+            <a:solidFill>
+              <a:srgbClr val="999999"/>
+            </a:solidFill>
+          </a:ln>
+        </p:spPr>
+        <p:style>
+          <a:lnRef idx="1">
+            <a:schemeClr val="accent1"/>
+          </a:lnRef>
+          <a:fillRef idx="3">
+            <a:schemeClr val="accent1"/>
+          </a:fillRef>
+          <a:effectRef idx="2">
+            <a:schemeClr val="accent1"/>
+          </a:effectRef>
+          <a:fontRef idx="minor">
+            <a:schemeClr val="lt1"/>
+          </a:fontRef>
+        </p:style>
+        <p:txBody>
+          <a:bodyPr rtlCol="0" anchor="ctr"/>
+          <a:lstStyle/>
+          <a:p>
+            <a:pPr algn="ctr"/>
+          </a:p>
+        </p:txBody>
+      </p:sp>
+      <p:sp>
+        <p:nvSpPr>
+          <p:cNvPr id="15" name="Rectangle 14"/>
+          <p:cNvSpPr/>
+          <p:nvPr/>
+        </p:nvSpPr>
+        <p:spPr>
+          <a:xfrm>
+            <a:off x="700000" y="3310000"/>
+            <a:ext cx="90000" cy="850000"/>
+          </a:xfrm>
+          <a:prstGeom prst="rect">
+            <a:avLst/>
+          </a:prstGeom>
+          <a:solidFill>
+            <a:srgbClr val="CC0000"/>
+          </a:solidFill>
+          <a:ln>
+            <a:noFill/>
+          </a:ln>
+        </p:spPr>
+        <p:style>
+          <a:lnRef idx="1">
+            <a:schemeClr val="accent1"/>
+          </a:lnRef>
+          <a:fillRef idx="3">
+            <a:schemeClr val="accent1"/>
+          </a:fillRef>
+          <a:effectRef idx="2">
+            <a:schemeClr val="accent1"/>
+          </a:effectRef>
+          <a:fontRef idx="minor">
+            <a:schemeClr val="lt1"/>
+          </a:fontRef>
+        </p:style>
+        <p:txBody>
+          <a:bodyPr rtlCol="0" anchor="ctr"/>
+          <a:lstStyle/>
+          <a:p>
+            <a:pPr algn="ctr"/>
+          </a:p>
+        </p:txBody>
+      </p:sp>
+      <p:sp>
+        <p:nvSpPr>
+          <p:cNvPr id="16" name="TextBox 15"/>
+          <p:cNvSpPr txBox="1"/>
+          <p:nvPr/>
+        </p:nvSpPr>
+        <p:spPr>
+          <a:xfrm>
+            <a:off x="1000000" y="3390000"/>
+            <a:ext cx="10400000" cy="690000"/>
+          </a:xfrm>
+          <a:prstGeom prst="rect">
+            <a:avLst/>
+          </a:prstGeom>
+          <a:noFill/>
+        </p:spPr>
+        <p:txBody>
+          <a:bodyPr wrap="square" anchor="ctr">
+            <a:spAutoFit/>
+          </a:bodyPr>
+          <a:lstStyle/>
+          <a:p>
+            <a:pPr algn="l"/>
+            <a:r>
+              <a:rPr sz="1300" b="0">
+                <a:solidFill>
+                  <a:srgbClr val="333333"/>
+                </a:solidFill>
+                <a:latin typeface="Open Sans"/>
+                <a:ea typeface="Open Sans"/>
+                <a:cs typeface="Open Sans"/>
+              </a:rPr>
+              <a:t>До поездки остановите кровотечение и зафиксируйте переломы</a:t>
+            </a:r>
+          </a:p>
+        </p:txBody>
+      </p:sp>
+      <p:sp>
+        <p:nvSpPr>
+          <p:cNvPr id="17" name="Rectangle 16"/>
+          <p:cNvSpPr/>
+          <p:nvPr/>
+        </p:nvSpPr>
+        <p:spPr>
+          <a:xfrm>
+            <a:off x="700000" y="4240000"/>
+            <a:ext cx="11000000" cy="850000"/>
+          </a:xfrm>
+          <a:prstGeom prst="rect">
+            <a:avLst/>
+          </a:prstGeom>
+          <a:solidFill>
+            <a:srgbClr val="FFFFFF"/>
+          </a:solidFill>
+          <a:ln w="12700">
+            <a:solidFill>
+              <a:srgbClr val="999999"/>
+            </a:solidFill>
+          </a:ln>
+        </p:spPr>
+        <p:style>
+          <a:lnRef idx="1">
+            <a:schemeClr val="accent1"/>
+          </a:lnRef>
+          <a:fillRef idx="3">
+            <a:schemeClr val="accent1"/>
+          </a:fillRef>
+          <a:effectRef idx="2">
+            <a:schemeClr val="accent1"/>
+          </a:effectRef>
+          <a:fontRef idx="minor">
+            <a:schemeClr val="lt1"/>
+          </a:fontRef>
+        </p:style>
+        <p:txBody>
+          <a:bodyPr rtlCol="0" anchor="ctr"/>
+          <a:lstStyle/>
+          <a:p>
+            <a:pPr algn="ctr"/>
+          </a:p>
+        </p:txBody>
+      </p:sp>
+      <p:sp>
+        <p:nvSpPr>
+          <p:cNvPr id="18" name="Rectangle 17"/>
+          <p:cNvSpPr/>
+          <p:nvPr/>
+        </p:nvSpPr>
+        <p:spPr>
+          <a:xfrm>
+            <a:off x="700000" y="4240000"/>
+            <a:ext cx="90000" cy="850000"/>
+          </a:xfrm>
+          <a:prstGeom prst="rect">
+            <a:avLst/>
+          </a:prstGeom>
+          <a:solidFill>
+            <a:srgbClr val="CC0000"/>
+          </a:solidFill>
+          <a:ln>
+            <a:noFill/>
+          </a:ln>
+        </p:spPr>
+        <p:style>
+          <a:lnRef idx="1">
+            <a:schemeClr val="accent1"/>
+          </a:lnRef>
+          <a:fillRef idx="3">
+            <a:schemeClr val="accent1"/>
+          </a:fillRef>
+          <a:effectRef idx="2">
+            <a:schemeClr val="accent1"/>
+          </a:effectRef>
+          <a:fontRef idx="minor">
+            <a:schemeClr val="lt1"/>
+          </a:fontRef>
+        </p:style>
+        <p:txBody>
+          <a:bodyPr rtlCol="0" anchor="ctr"/>
+          <a:lstStyle/>
+          <a:p>
+            <a:pPr algn="ctr"/>
+          </a:p>
+        </p:txBody>
+      </p:sp>
+      <p:sp>
+        <p:nvSpPr>
+          <p:cNvPr id="19" name="TextBox 18"/>
+          <p:cNvSpPr txBox="1"/>
+          <p:nvPr/>
+        </p:nvSpPr>
+        <p:spPr>
+          <a:xfrm>
+            <a:off x="1000000" y="4320000"/>
+            <a:ext cx="10400000" cy="690000"/>
+          </a:xfrm>
+          <a:prstGeom prst="rect">
+            <a:avLst/>
+          </a:prstGeom>
+          <a:noFill/>
+        </p:spPr>
+        <p:txBody>
+          <a:bodyPr wrap="square" anchor="ctr">
+            <a:spAutoFit/>
+          </a:bodyPr>
+          <a:lstStyle/>
+          <a:p>
+            <a:pPr algn="l"/>
+            <a:r>
+              <a:rPr sz="1300" b="0">
+                <a:solidFill>
+                  <a:srgbClr val="333333"/>
+                </a:solidFill>
+                <a:latin typeface="Open Sans"/>
+                <a:ea typeface="Open Sans"/>
+                <a:cs typeface="Open Sans"/>
+              </a:rPr>
+              <a:t>Выберите ближайшую подходящую медицинскую организацию</a:t>
+            </a:r>
+          </a:p>
+        </p:txBody>
+      </p:sp>
+      <p:sp>
+        <p:nvSpPr>
+          <p:cNvPr id="20" name="Rectangle 19"/>
+          <p:cNvSpPr/>
+          <p:nvPr/>
+        </p:nvSpPr>
+        <p:spPr>
+          <a:xfrm>
+            <a:off x="700000" y="5170000"/>
+            <a:ext cx="11000000" cy="850000"/>
+          </a:xfrm>
+          <a:prstGeom prst="rect">
+            <a:avLst/>
+          </a:prstGeom>
+          <a:solidFill>
+            <a:srgbClr val="FFFFFF"/>
+          </a:solidFill>
+          <a:ln w="12700">
+            <a:solidFill>
+              <a:srgbClr val="999999"/>
+            </a:solidFill>
+          </a:ln>
+        </p:spPr>
+        <p:style>
+          <a:lnRef idx="1">
+            <a:schemeClr val="accent1"/>
+          </a:lnRef>
+          <a:fillRef idx="3">
+            <a:schemeClr val="accent1"/>
+          </a:fillRef>
+          <a:effectRef idx="2">
+            <a:schemeClr val="accent1"/>
+          </a:effectRef>
+          <a:fontRef idx="minor">
+            <a:schemeClr val="lt1"/>
+          </a:fontRef>
+        </p:style>
+        <p:txBody>
+          <a:bodyPr rtlCol="0" anchor="ctr"/>
+          <a:lstStyle/>
+          <a:p>
+            <a:pPr algn="ctr"/>
+          </a:p>
+        </p:txBody>
+      </p:sp>
+      <p:sp>
+        <p:nvSpPr>
+          <p:cNvPr id="21" name="Rectangle 20"/>
+          <p:cNvSpPr/>
+          <p:nvPr/>
+        </p:nvSpPr>
+        <p:spPr>
+          <a:xfrm>
+            <a:off x="700000" y="5170000"/>
+            <a:ext cx="90000" cy="850000"/>
+          </a:xfrm>
+          <a:prstGeom prst="rect">
+            <a:avLst/>
+          </a:prstGeom>
+          <a:solidFill>
+            <a:srgbClr val="CC0000"/>
+          </a:solidFill>
+          <a:ln>
+            <a:noFill/>
+          </a:ln>
+        </p:spPr>
+        <p:style>
+          <a:lnRef idx="1">
+            <a:schemeClr val="accent1"/>
+          </a:lnRef>
+          <a:fillRef idx="3">
+            <a:schemeClr val="accent1"/>
+          </a:fillRef>
+          <a:effectRef idx="2">
+            <a:schemeClr val="accent1"/>
+          </a:effectRef>
+          <a:fontRef idx="minor">
+            <a:schemeClr val="lt1"/>
+          </a:fontRef>
+        </p:style>
+        <p:txBody>
+          <a:bodyPr rtlCol="0" anchor="ctr"/>
+          <a:lstStyle/>
+          <a:p>
+            <a:pPr algn="ctr"/>
+          </a:p>
+        </p:txBody>
+      </p:sp>
+      <p:sp>
+        <p:nvSpPr>
+          <p:cNvPr id="22" name="TextBox 21"/>
+          <p:cNvSpPr txBox="1"/>
+          <p:nvPr/>
+        </p:nvSpPr>
+        <p:spPr>
+          <a:xfrm>
+            <a:off x="1000000" y="5250000"/>
+            <a:ext cx="10400000" cy="690000"/>
+          </a:xfrm>
+          <a:prstGeom prst="rect">
+            <a:avLst/>
+          </a:prstGeom>
+          <a:noFill/>
+        </p:spPr>
+        <p:txBody>
+          <a:bodyPr wrap="square" anchor="ctr">
+            <a:spAutoFit/>
+          </a:bodyPr>
+          <a:lstStyle/>
+          <a:p>
+            <a:pPr algn="l"/>
+            <a:r>
+              <a:rPr sz="1300" b="0">
+                <a:solidFill>
+                  <a:srgbClr val="333333"/>
+                </a:solidFill>
+                <a:latin typeface="Open Sans"/>
+                <a:ea typeface="Open Sans"/>
+                <a:cs typeface="Open Sans"/>
+              </a:rPr>
+              <a:t>В пути обеспечьте комфорт и непрерывное наблюдение</a:t>
+            </a:r>
+          </a:p>
+        </p:txBody>
+      </p:sp>
+    </p:spTree>
+  </p:cSld>
+  <p:clrMapOvr>
+    <a:masterClrMapping/>
+  </p:clrMapOvr>
+</p:sld>
+</file>
+
+<file path=ppt/slides/slide13.xml><?xml version="1.0" encoding="utf-8"?>
+<p:sld xmlns:a="http://schemas.openxmlformats.org/drawingml/2006/main" xmlns:p="http://schemas.openxmlformats.org/presentationml/2006/main" xmlns:r="http://schemas.openxmlformats.org/officeDocument/2006/relationships">
+  <p:cSld>
+    <p:spTree>
+      <p:nvGrpSpPr>
+        <p:cNvPr id="1" name=""/>
+        <p:cNvGrpSpPr/>
+        <p:nvPr/>
+      </p:nvGrpSpPr>
+      <p:grpSpPr/>
+      <p:sp>
+        <p:nvSpPr>
+          <p:cNvPr id="2" name="Rectangle 1"/>
+          <p:cNvSpPr/>
+          <p:nvPr/>
+        </p:nvSpPr>
+        <p:spPr>
+          <a:xfrm>
+            <a:off x="0" y="0"/>
+            <a:ext cx="12191695" cy="6858000"/>
+          </a:xfrm>
+          <a:prstGeom prst="rect">
+            <a:avLst/>
+          </a:prstGeom>
+          <a:solidFill>
+            <a:srgbClr val="FFFFFF"/>
+          </a:solidFill>
+          <a:ln>
+            <a:noFill/>
+          </a:ln>
+        </p:spPr>
+        <p:style>
+          <a:lnRef idx="1">
+            <a:schemeClr val="accent1"/>
+          </a:lnRef>
+          <a:fillRef idx="3">
+            <a:schemeClr val="accent1"/>
+          </a:fillRef>
+          <a:effectRef idx="2">
+            <a:schemeClr val="accent1"/>
+          </a:effectRef>
+          <a:fontRef idx="minor">
+            <a:schemeClr val="lt1"/>
+          </a:fontRef>
+        </p:style>
+        <p:txBody>
+          <a:bodyPr rtlCol="0" anchor="ctr"/>
+          <a:lstStyle/>
+          <a:p>
+            <a:pPr algn="ctr"/>
+          </a:p>
+        </p:txBody>
+      </p:sp>
+      <p:sp>
+        <p:nvSpPr>
+          <p:cNvPr id="3" name="TextBox 2"/>
+          <p:cNvSpPr txBox="1"/>
+          <p:nvPr/>
+        </p:nvSpPr>
+        <p:spPr>
+          <a:xfrm>
+            <a:off x="700000" y="250000"/>
+            <a:ext cx="11200000" cy="550000"/>
+          </a:xfrm>
+          <a:prstGeom prst="rect">
+            <a:avLst/>
+          </a:prstGeom>
+          <a:noFill/>
+        </p:spPr>
+        <p:txBody>
+          <a:bodyPr wrap="square" anchor="t">
+            <a:spAutoFit/>
+          </a:bodyPr>
+          <a:lstStyle/>
+          <a:p>
+            <a:pPr algn="l"/>
+            <a:r>
+              <a:rPr sz="2200" b="1">
+                <a:solidFill>
+                  <a:srgbClr val="333333"/>
+                </a:solidFill>
+                <a:latin typeface="Open Sans"/>
+                <a:ea typeface="Open Sans"/>
+                <a:cs typeface="Open Sans"/>
+              </a:rPr>
+              <a:t>ПАМЯТКА</a:t>
+            </a:r>
+          </a:p>
+        </p:txBody>
+      </p:sp>
+      <p:sp>
+        <p:nvSpPr>
+          <p:cNvPr id="4" name="Rectangle 3"/>
+          <p:cNvSpPr/>
+          <p:nvPr/>
+        </p:nvSpPr>
+        <p:spPr>
+          <a:xfrm>
+            <a:off x="700000" y="850000"/>
+            <a:ext cx="9000000" cy="28000"/>
+          </a:xfrm>
+          <a:prstGeom prst="rect">
+            <a:avLst/>
+          </a:prstGeom>
+          <a:solidFill>
+            <a:srgbClr val="555555"/>
+          </a:solidFill>
+          <a:ln>
+            <a:noFill/>
+          </a:ln>
+        </p:spPr>
+        <p:style>
+          <a:lnRef idx="1">
+            <a:schemeClr val="accent1"/>
+          </a:lnRef>
+          <a:fillRef idx="3">
+            <a:schemeClr val="accent1"/>
+          </a:fillRef>
+          <a:effectRef idx="2">
+            <a:schemeClr val="accent1"/>
+          </a:effectRef>
+          <a:fontRef idx="minor">
+            <a:schemeClr val="lt1"/>
+          </a:fontRef>
+        </p:style>
+        <p:txBody>
+          <a:bodyPr rtlCol="0" anchor="ctr"/>
+          <a:lstStyle/>
+          <a:p>
+            <a:pPr algn="ctr"/>
+          </a:p>
+        </p:txBody>
+      </p:sp>
+      <p:sp>
+        <p:nvSpPr>
+          <p:cNvPr id="5" name="TextBox 4"/>
+          <p:cNvSpPr txBox="1"/>
+          <p:nvPr/>
+        </p:nvSpPr>
+        <p:spPr>
+          <a:xfrm>
+            <a:off x="700000" y="920000"/>
+            <a:ext cx="11000000" cy="350000"/>
+          </a:xfrm>
+          <a:prstGeom prst="rect">
+            <a:avLst/>
+          </a:prstGeom>
+          <a:noFill/>
+        </p:spPr>
+        <p:txBody>
+          <a:bodyPr wrap="square" anchor="t">
+            <a:spAutoFit/>
+          </a:bodyPr>
+          <a:lstStyle/>
+          <a:p>
+            <a:pPr algn="l"/>
+            <a:r>
+              <a:rPr sz="1200" b="0">
+                <a:solidFill>
+                  <a:srgbClr val="666666"/>
+                </a:solidFill>
+                <a:latin typeface="Open Sans"/>
+                <a:ea typeface="Open Sans"/>
+                <a:cs typeface="Open Sans"/>
+              </a:rPr>
+              <a:t>Оказание первой помощи при травмах, ранениях и поражениях, прочих состояниях</a:t>
+            </a:r>
+          </a:p>
+        </p:txBody>
+      </p:sp>
+      <p:sp>
+        <p:nvSpPr>
+          <p:cNvPr id="6" name="Rectangle 5"/>
+          <p:cNvSpPr/>
+          <p:nvPr/>
+        </p:nvSpPr>
+        <p:spPr>
+          <a:xfrm>
+            <a:off x="0" y="2800000"/>
+            <a:ext cx="420000" cy="420000"/>
+          </a:xfrm>
+          <a:prstGeom prst="rect">
+            <a:avLst/>
+          </a:prstGeom>
+          <a:solidFill>
+            <a:srgbClr val="555555"/>
+          </a:solidFill>
+          <a:ln>
+            <a:noFill/>
+          </a:ln>
+        </p:spPr>
+        <p:style>
+          <a:lnRef idx="1">
+            <a:schemeClr val="accent1"/>
+          </a:lnRef>
+          <a:fillRef idx="3">
+            <a:schemeClr val="accent1"/>
+          </a:fillRef>
+          <a:effectRef idx="2">
+            <a:schemeClr val="accent1"/>
+          </a:effectRef>
+          <a:fontRef idx="minor">
+            <a:schemeClr val="lt1"/>
+          </a:fontRef>
+        </p:style>
+        <p:txBody>
+          <a:bodyPr rtlCol="0" anchor="ctr"/>
+          <a:lstStyle/>
+          <a:p>
+            <a:pPr algn="ctr"/>
+          </a:p>
+        </p:txBody>
+      </p:sp>
+      <p:sp>
+        <p:nvSpPr>
+          <p:cNvPr id="7" name="TextBox 6"/>
+          <p:cNvSpPr txBox="1"/>
+          <p:nvPr/>
+        </p:nvSpPr>
+        <p:spPr>
+          <a:xfrm>
+            <a:off x="0" y="2800000"/>
+            <a:ext cx="420000" cy="420000"/>
+          </a:xfrm>
+          <a:prstGeom prst="rect">
+            <a:avLst/>
+          </a:prstGeom>
+          <a:noFill/>
+        </p:spPr>
+        <p:txBody>
+          <a:bodyPr wrap="square" anchor="ctr">
+            <a:spAutoFit/>
+          </a:bodyPr>
+          <a:lstStyle/>
+          <a:p>
+            <a:pPr algn="ctr"/>
+            <a:r>
+              <a:rPr sz="1400" b="1">
+                <a:solidFill>
+                  <a:srgbClr val="FFFFFF"/>
+                </a:solidFill>
+                <a:latin typeface="Open Sans"/>
+                <a:ea typeface="Open Sans"/>
+                <a:cs typeface="Open Sans"/>
+              </a:rPr>
+              <a:t>13</a:t>
+            </a:r>
+          </a:p>
+        </p:txBody>
+      </p:sp>
+      <p:pic>
+        <p:nvPicPr>
+          <p:cNvPr id="8" name="Picture 7" descr="pamyatka-tema4-transportirovka-16x9.png"/>
+          <p:cNvPicPr>
+            <a:picLocks noChangeAspect="1"/>
+          </p:cNvPicPr>
+          <p:nvPr/>
+        </p:nvPicPr>
+        <p:blipFill>
+          <a:blip r:embed="rId2"/>
+          <a:stretch>
+            <a:fillRect/>
+          </a:stretch>
+        </p:blipFill>
+        <p:spPr>
+          <a:xfrm>
+            <a:off x="2300000" y="1400000"/>
+            <a:ext cx="7800000" cy="5200000"/>
+          </a:xfrm>
+          <a:prstGeom prst="rect">
+            <a:avLst/>
+          </a:prstGeom>
+        </p:spPr>
+      </p:pic>
+    </p:spTree>
+  </p:cSld>
+  <p:clrMapOvr>
+    <a:masterClrMapping/>
+  </p:clrMapOvr>
+</p:sld>
+</file>
+
+<file path=ppt/slides/slide14.xml><?xml version="1.0" encoding="utf-8"?>
+<p:sld xmlns:a="http://schemas.openxmlformats.org/drawingml/2006/main" xmlns:p="http://schemas.openxmlformats.org/presentationml/2006/main" xmlns:r="http://schemas.openxmlformats.org/officeDocument/2006/relationships">
+  <p:cSld>
+    <p:spTree>
+      <p:nvGrpSpPr>
+        <p:cNvPr id="1" name=""/>
+        <p:cNvGrpSpPr/>
+        <p:nvPr/>
+      </p:nvGrpSpPr>
+      <p:grpSpPr/>
+      <p:sp>
+        <p:nvSpPr>
+          <p:cNvPr id="2" name="Rectangle 1"/>
+          <p:cNvSpPr/>
+          <p:nvPr/>
+        </p:nvSpPr>
+        <p:spPr>
+          <a:xfrm>
+            <a:off x="0" y="0"/>
             <a:ext cx="3400000" cy="6858000"/>
           </a:xfrm>
           <a:prstGeom prst="rect">
@@ -3943,7 +5952,7 @@
                 <a:ea typeface="Open Sans"/>
                 <a:cs typeface="Open Sans"/>
               </a:rPr>
-              <a:t>Когда транспортировать</a:t>
+              <a:t>Предпочтение скорой помощи</a:t>
             </a:r>
           </a:p>
         </p:txBody>
@@ -4105,7 +6114,7 @@
                 <a:ea typeface="Open Sans"/>
                 <a:cs typeface="Open Sans"/>
               </a:rPr>
-              <a:t>Куда доставлять</a:t>
+              <a:t>Самостоятельная доставка</a:t>
             </a:r>
           </a:p>
         </p:txBody>
@@ -4267,7 +6276,7 @@
                 <a:ea typeface="Open Sans"/>
                 <a:cs typeface="Open Sans"/>
               </a:rPr>
-              <a:t>Подготовка</a:t>
+              <a:t>Выбор места</a:t>
             </a:r>
           </a:p>
         </p:txBody>
@@ -4429,7 +6438,7 @@
                 <a:ea typeface="Open Sans"/>
                 <a:cs typeface="Open Sans"/>
               </a:rPr>
-              <a:t>Безопасность в пути</a:t>
+              <a:t>Подготовка и фиксация</a:t>
             </a:r>
           </a:p>
         </p:txBody>
@@ -4591,7 +6600,7 @@
                 <a:ea typeface="Open Sans"/>
                 <a:cs typeface="Open Sans"/>
               </a:rPr>
-              <a:t>Контроль состояния</a:t>
+              <a:t>Наблюдение в пути</a:t>
             </a:r>
           </a:p>
         </p:txBody>
@@ -4689,7 +6698,7 @@
                 <a:ea typeface="Open Sans"/>
                 <a:cs typeface="Open Sans"/>
               </a:rPr>
-              <a:t>ГЛАВНЫЙ ВЫБОР</a:t>
+              <a:t>ПОЧЕМУ ПРЕДПОЧТИТЕЛЬНА СКОРАЯ ПОМОЩЬ</a:t>
             </a:r>
           </a:p>
         </p:txBody>
@@ -4862,8 +6871,8 @@
         </p:nvSpPr>
         <p:spPr>
           <a:xfrm>
-            <a:off x="700000" y="1600000"/>
-            <a:ext cx="11000000" cy="4200000"/>
+            <a:off x="700000" y="1500000"/>
+            <a:ext cx="11000000" cy="4900000"/>
           </a:xfrm>
           <a:prstGeom prst="rect">
             <a:avLst/>
@@ -4878,7 +6887,7 @@
           <a:p>
             <a:pPr algn="l"/>
             <a:r>
-              <a:rPr sz="1600" b="0">
+              <a:rPr sz="1500" b="0">
                 <a:solidFill>
                   <a:srgbClr val="333333"/>
                 </a:solidFill>
@@ -4886,7 +6895,7 @@
                 <a:ea typeface="Open Sans"/>
                 <a:cs typeface="Open Sans"/>
               </a:rPr>
-              <a:t>Предпочтительно дождаться бригады скорой медицинской помощи. Самостоятельная транспортировка допустима только при обоснованной необходимости и безопасной возможности.</a:t>
+              <a:t>Бригада скорой медицинской помощи располагает обученным персоналом, средствами иммобилизации, кислородом и оборудованием для наблюдения и реанимации. При тяжелой травме самостоятельное перемещение может усилить кровотечение, сместить отломки или повредить позвоночник.</a:t>
             </a:r>
           </a:p>
         </p:txBody>
@@ -4984,7 +6993,7 @@
                 <a:ea typeface="Open Sans"/>
                 <a:cs typeface="Open Sans"/>
               </a:rPr>
-              <a:t>КОГДА ВОЗМОЖНА САМОСТОЯТЕЛЬНАЯ ДОСТАВКА</a:t>
+              <a:t>КОГДА РАССМАТРИВАЮТ САМОСТОЯТЕЛЬНУЮ ДОСТАВКУ</a:t>
             </a:r>
           </a:p>
         </p:txBody>
@@ -5157,8 +7166,8 @@
         </p:nvSpPr>
         <p:spPr>
           <a:xfrm>
-            <a:off x="700000" y="1450000"/>
-            <a:ext cx="3500000" cy="4800000"/>
+            <a:off x="700000" y="1400000"/>
+            <a:ext cx="5400000" cy="2420000"/>
           </a:xfrm>
           <a:prstGeom prst="rect">
             <a:avLst/>
@@ -5202,8 +7211,8 @@
         </p:nvSpPr>
         <p:spPr>
           <a:xfrm>
-            <a:off x="850000" y="1650000"/>
-            <a:ext cx="500000" cy="500000"/>
+            <a:off x="820000" y="1550000"/>
+            <a:ext cx="450000" cy="450000"/>
           </a:xfrm>
           <a:prstGeom prst="ellipse">
             <a:avLst/>
@@ -5245,8 +7254,8 @@
         </p:nvSpPr>
         <p:spPr>
           <a:xfrm>
-            <a:off x="850000" y="1650000"/>
-            <a:ext cx="500000" cy="500000"/>
+            <a:off x="820000" y="1550000"/>
+            <a:ext cx="450000" cy="450000"/>
           </a:xfrm>
           <a:prstGeom prst="rect">
             <a:avLst/>
@@ -5261,7 +7270,7 @@
           <a:p>
             <a:pPr algn="ctr"/>
             <a:r>
-              <a:rPr sz="1400" b="1">
+              <a:rPr sz="1300" b="1">
                 <a:solidFill>
                   <a:srgbClr val="FFFFFF"/>
                 </a:solidFill>
@@ -5282,8 +7291,8 @@
         </p:nvSpPr>
         <p:spPr>
           <a:xfrm>
-            <a:off x="1450000" y="1700000"/>
-            <a:ext cx="2600000" cy="450000"/>
+            <a:off x="1350000" y="1580000"/>
+            <a:ext cx="4600000" cy="400000"/>
           </a:xfrm>
           <a:prstGeom prst="rect">
             <a:avLst/>
@@ -5298,7 +7307,7 @@
           <a:p>
             <a:pPr algn="l"/>
             <a:r>
-              <a:rPr sz="1300" b="1">
+              <a:rPr sz="1200" b="1">
                 <a:solidFill>
                   <a:srgbClr val="333333"/>
                 </a:solidFill>
@@ -5319,8 +7328,8 @@
         </p:nvSpPr>
         <p:spPr>
           <a:xfrm>
-            <a:off x="850000" y="2300000"/>
-            <a:ext cx="3200000" cy="3800000"/>
+            <a:off x="820000" y="2100000"/>
+            <a:ext cx="5160000" cy="1570000"/>
           </a:xfrm>
           <a:prstGeom prst="rect">
             <a:avLst/>
@@ -5343,7 +7352,7 @@
                 <a:ea typeface="Open Sans"/>
                 <a:cs typeface="Open Sans"/>
               </a:rPr>
-              <a:t>Невозможно вызвать скорую медицинскую помощь.</a:t>
+              <a:t>Вызвать скорую помощь невозможно, а оставаться без медицинской помощи опаснее перевозки.</a:t>
             </a:r>
           </a:p>
         </p:txBody>
@@ -5356,8 +7365,8 @@
         </p:nvSpPr>
         <p:spPr>
           <a:xfrm>
-            <a:off x="4450000" y="1450000"/>
-            <a:ext cx="3500000" cy="4800000"/>
+            <a:off x="6300000" y="1400000"/>
+            <a:ext cx="5400000" cy="2420000"/>
           </a:xfrm>
           <a:prstGeom prst="rect">
             <a:avLst/>
@@ -5401,8 +7410,8 @@
         </p:nvSpPr>
         <p:spPr>
           <a:xfrm>
-            <a:off x="4600000" y="1650000"/>
-            <a:ext cx="500000" cy="500000"/>
+            <a:off x="6420000" y="1550000"/>
+            <a:ext cx="450000" cy="450000"/>
           </a:xfrm>
           <a:prstGeom prst="ellipse">
             <a:avLst/>
@@ -5444,8 +7453,8 @@
         </p:nvSpPr>
         <p:spPr>
           <a:xfrm>
-            <a:off x="4600000" y="1650000"/>
-            <a:ext cx="500000" cy="500000"/>
+            <a:off x="6420000" y="1550000"/>
+            <a:ext cx="450000" cy="450000"/>
           </a:xfrm>
           <a:prstGeom prst="rect">
             <a:avLst/>
@@ -5460,7 +7469,7 @@
           <a:p>
             <a:pPr algn="ctr"/>
             <a:r>
-              <a:rPr sz="1400" b="1">
+              <a:rPr sz="1300" b="1">
                 <a:solidFill>
                   <a:srgbClr val="FFFFFF"/>
                 </a:solidFill>
@@ -5481,8 +7490,8 @@
         </p:nvSpPr>
         <p:spPr>
           <a:xfrm>
-            <a:off x="5200000" y="1700000"/>
-            <a:ext cx="2600000" cy="450000"/>
+            <a:off x="6950000" y="1580000"/>
+            <a:ext cx="4600000" cy="400000"/>
           </a:xfrm>
           <a:prstGeom prst="rect">
             <a:avLst/>
@@ -5497,7 +7506,7 @@
           <a:p>
             <a:pPr algn="l"/>
             <a:r>
-              <a:rPr sz="1300" b="1">
+              <a:rPr sz="1200" b="1">
                 <a:solidFill>
                   <a:srgbClr val="333333"/>
                 </a:solidFill>
@@ -5505,7 +7514,7 @@
                 <a:ea typeface="Open Sans"/>
                 <a:cs typeface="Open Sans"/>
               </a:rPr>
-              <a:t>Бригада не доберется</a:t>
+              <a:t>Бригада недоступна</a:t>
             </a:r>
           </a:p>
         </p:txBody>
@@ -5518,8 +7527,8 @@
         </p:nvSpPr>
         <p:spPr>
           <a:xfrm>
-            <a:off x="4600000" y="2300000"/>
-            <a:ext cx="3200000" cy="3800000"/>
+            <a:off x="6420000" y="2100000"/>
+            <a:ext cx="5160000" cy="1570000"/>
           </a:xfrm>
           <a:prstGeom prst="rect">
             <a:avLst/>
@@ -5542,7 +7551,7 @@
                 <a:ea typeface="Open Sans"/>
                 <a:cs typeface="Open Sans"/>
               </a:rPr>
-              <a:t>Мешают расстояние, погода или особенности местности.</a:t>
+              <a:t>Расстояние, погода или местность не позволяют специалистам добраться до пострадавшего.</a:t>
             </a:r>
           </a:p>
         </p:txBody>
@@ -5555,8 +7564,8 @@
         </p:nvSpPr>
         <p:spPr>
           <a:xfrm>
-            <a:off x="8200000" y="1450000"/>
-            <a:ext cx="3500000" cy="4800000"/>
+            <a:off x="700000" y="3980000"/>
+            <a:ext cx="5400000" cy="2420000"/>
           </a:xfrm>
           <a:prstGeom prst="rect">
             <a:avLst/>
@@ -5600,8 +7609,8 @@
         </p:nvSpPr>
         <p:spPr>
           <a:xfrm>
-            <a:off x="8350000" y="1650000"/>
-            <a:ext cx="500000" cy="500000"/>
+            <a:off x="820000" y="4130000"/>
+            <a:ext cx="450000" cy="450000"/>
           </a:xfrm>
           <a:prstGeom prst="ellipse">
             <a:avLst/>
@@ -5643,8 +7652,8 @@
         </p:nvSpPr>
         <p:spPr>
           <a:xfrm>
-            <a:off x="8350000" y="1650000"/>
-            <a:ext cx="500000" cy="500000"/>
+            <a:off x="820000" y="4130000"/>
+            <a:ext cx="450000" cy="450000"/>
           </a:xfrm>
           <a:prstGeom prst="rect">
             <a:avLst/>
@@ -5659,7 +7668,7 @@
           <a:p>
             <a:pPr algn="ctr"/>
             <a:r>
-              <a:rPr sz="1400" b="1">
+              <a:rPr sz="1300" b="1">
                 <a:solidFill>
                   <a:srgbClr val="FFFFFF"/>
                 </a:solidFill>
@@ -5680,8 +7689,8 @@
         </p:nvSpPr>
         <p:spPr>
           <a:xfrm>
-            <a:off x="8950000" y="1700000"/>
-            <a:ext cx="2600000" cy="450000"/>
+            <a:off x="1350000" y="4160000"/>
+            <a:ext cx="4600000" cy="400000"/>
           </a:xfrm>
           <a:prstGeom prst="rect">
             <a:avLst/>
@@ -5696,7 +7705,7 @@
           <a:p>
             <a:pPr algn="l"/>
             <a:r>
-              <a:rPr sz="1300" b="1">
+              <a:rPr sz="1200" b="1">
                 <a:solidFill>
                   <a:srgbClr val="333333"/>
                 </a:solidFill>
@@ -5704,7 +7713,7 @@
                 <a:ea typeface="Open Sans"/>
                 <a:cs typeface="Open Sans"/>
               </a:rPr>
-              <a:t>Легкая травма</a:t>
+              <a:t>Непосредственная опасность</a:t>
             </a:r>
           </a:p>
         </p:txBody>
@@ -5717,8 +7726,8 @@
         </p:nvSpPr>
         <p:spPr>
           <a:xfrm>
-            <a:off x="8350000" y="2300000"/>
-            <a:ext cx="3200000" cy="3800000"/>
+            <a:off x="820000" y="4680000"/>
+            <a:ext cx="5160000" cy="1570000"/>
           </a:xfrm>
           <a:prstGeom prst="rect">
             <a:avLst/>
@@ -5741,7 +7750,206 @@
                 <a:ea typeface="Open Sans"/>
                 <a:cs typeface="Open Sans"/>
               </a:rPr>
-              <a:t>Состояние позволяет безопасно доехать без специализированной перевозки.</a:t>
+              <a:t>Место происшествия нельзя сделать безопасным и требуется эвакуация.</a:t>
+            </a:r>
+          </a:p>
+        </p:txBody>
+      </p:sp>
+      <p:sp>
+        <p:nvSpPr>
+          <p:cNvPr id="23" name="Rectangle 22"/>
+          <p:cNvSpPr/>
+          <p:nvPr/>
+        </p:nvSpPr>
+        <p:spPr>
+          <a:xfrm>
+            <a:off x="6300000" y="3980000"/>
+            <a:ext cx="5400000" cy="2420000"/>
+          </a:xfrm>
+          <a:prstGeom prst="rect">
+            <a:avLst/>
+          </a:prstGeom>
+          <a:solidFill>
+            <a:srgbClr val="FFFFFF"/>
+          </a:solidFill>
+          <a:ln w="12700">
+            <a:solidFill>
+              <a:srgbClr val="999999"/>
+            </a:solidFill>
+          </a:ln>
+        </p:spPr>
+        <p:style>
+          <a:lnRef idx="1">
+            <a:schemeClr val="accent1"/>
+          </a:lnRef>
+          <a:fillRef idx="3">
+            <a:schemeClr val="accent1"/>
+          </a:fillRef>
+          <a:effectRef idx="2">
+            <a:schemeClr val="accent1"/>
+          </a:effectRef>
+          <a:fontRef idx="minor">
+            <a:schemeClr val="lt1"/>
+          </a:fontRef>
+        </p:style>
+        <p:txBody>
+          <a:bodyPr rtlCol="0" anchor="ctr"/>
+          <a:lstStyle/>
+          <a:p>
+            <a:pPr algn="ctr"/>
+          </a:p>
+        </p:txBody>
+      </p:sp>
+      <p:sp>
+        <p:nvSpPr>
+          <p:cNvPr id="24" name="Oval 23"/>
+          <p:cNvSpPr/>
+          <p:nvPr/>
+        </p:nvSpPr>
+        <p:spPr>
+          <a:xfrm>
+            <a:off x="6420000" y="4130000"/>
+            <a:ext cx="450000" cy="450000"/>
+          </a:xfrm>
+          <a:prstGeom prst="ellipse">
+            <a:avLst/>
+          </a:prstGeom>
+          <a:solidFill>
+            <a:srgbClr val="555555"/>
+          </a:solidFill>
+          <a:ln>
+            <a:noFill/>
+          </a:ln>
+        </p:spPr>
+        <p:style>
+          <a:lnRef idx="1">
+            <a:schemeClr val="accent1"/>
+          </a:lnRef>
+          <a:fillRef idx="3">
+            <a:schemeClr val="accent1"/>
+          </a:fillRef>
+          <a:effectRef idx="2">
+            <a:schemeClr val="accent1"/>
+          </a:effectRef>
+          <a:fontRef idx="minor">
+            <a:schemeClr val="lt1"/>
+          </a:fontRef>
+        </p:style>
+        <p:txBody>
+          <a:bodyPr rtlCol="0" anchor="ctr"/>
+          <a:lstStyle/>
+          <a:p>
+            <a:pPr algn="ctr"/>
+          </a:p>
+        </p:txBody>
+      </p:sp>
+      <p:sp>
+        <p:nvSpPr>
+          <p:cNvPr id="25" name="TextBox 24"/>
+          <p:cNvSpPr txBox="1"/>
+          <p:nvPr/>
+        </p:nvSpPr>
+        <p:spPr>
+          <a:xfrm>
+            <a:off x="6420000" y="4130000"/>
+            <a:ext cx="450000" cy="450000"/>
+          </a:xfrm>
+          <a:prstGeom prst="rect">
+            <a:avLst/>
+          </a:prstGeom>
+          <a:noFill/>
+        </p:spPr>
+        <p:txBody>
+          <a:bodyPr wrap="square" anchor="ctr">
+            <a:spAutoFit/>
+          </a:bodyPr>
+          <a:lstStyle/>
+          <a:p>
+            <a:pPr algn="ctr"/>
+            <a:r>
+              <a:rPr sz="1300" b="1">
+                <a:solidFill>
+                  <a:srgbClr val="FFFFFF"/>
+                </a:solidFill>
+                <a:latin typeface="Open Sans"/>
+                <a:ea typeface="Open Sans"/>
+                <a:cs typeface="Open Sans"/>
+              </a:rPr>
+              <a:t>4</a:t>
+            </a:r>
+          </a:p>
+        </p:txBody>
+      </p:sp>
+      <p:sp>
+        <p:nvSpPr>
+          <p:cNvPr id="26" name="TextBox 25"/>
+          <p:cNvSpPr txBox="1"/>
+          <p:nvPr/>
+        </p:nvSpPr>
+        <p:spPr>
+          <a:xfrm>
+            <a:off x="6950000" y="4160000"/>
+            <a:ext cx="4600000" cy="400000"/>
+          </a:xfrm>
+          <a:prstGeom prst="rect">
+            <a:avLst/>
+          </a:prstGeom>
+          <a:noFill/>
+        </p:spPr>
+        <p:txBody>
+          <a:bodyPr wrap="square" anchor="t">
+            <a:spAutoFit/>
+          </a:bodyPr>
+          <a:lstStyle/>
+          <a:p>
+            <a:pPr algn="l"/>
+            <a:r>
+              <a:rPr sz="1200" b="1">
+                <a:solidFill>
+                  <a:srgbClr val="333333"/>
+                </a:solidFill>
+                <a:latin typeface="Open Sans"/>
+                <a:ea typeface="Open Sans"/>
+                <a:cs typeface="Open Sans"/>
+              </a:rPr>
+              <a:t>Легкое состояние</a:t>
+            </a:r>
+          </a:p>
+        </p:txBody>
+      </p:sp>
+      <p:sp>
+        <p:nvSpPr>
+          <p:cNvPr id="27" name="TextBox 26"/>
+          <p:cNvSpPr txBox="1"/>
+          <p:nvPr/>
+        </p:nvSpPr>
+        <p:spPr>
+          <a:xfrm>
+            <a:off x="6420000" y="4680000"/>
+            <a:ext cx="5160000" cy="1570000"/>
+          </a:xfrm>
+          <a:prstGeom prst="rect">
+            <a:avLst/>
+          </a:prstGeom>
+          <a:noFill/>
+        </p:spPr>
+        <p:txBody>
+          <a:bodyPr wrap="square" anchor="t">
+            <a:spAutoFit/>
+          </a:bodyPr>
+          <a:lstStyle/>
+          <a:p>
+            <a:pPr algn="l"/>
+            <a:r>
+              <a:rPr sz="1200" b="0">
+                <a:solidFill>
+                  <a:srgbClr val="666666"/>
+                </a:solidFill>
+                <a:latin typeface="Open Sans"/>
+                <a:ea typeface="Open Sans"/>
+                <a:cs typeface="Open Sans"/>
+              </a:rPr>
+              <a:t>Травма допускает безопасную поездку без специальной медицинской транспортировки.</a:t>
             </a:r>
           </a:p>
         </p:txBody>
@@ -5839,7 +8047,7 @@
                 <a:ea typeface="Open Sans"/>
                 <a:cs typeface="Open Sans"/>
               </a:rPr>
-              <a:t>КУДА ДОСТАВЛЯТЬ</a:t>
+              <a:t>КОГДА ПЕРЕВОЗКА ОСОБЕННО РИСКОВАННА</a:t>
             </a:r>
           </a:p>
         </p:txBody>
@@ -6012,8 +8220,8 @@
         </p:nvSpPr>
         <p:spPr>
           <a:xfrm>
-            <a:off x="700000" y="1500000"/>
-            <a:ext cx="11000000" cy="4200000"/>
+            <a:off x="700000" y="1450000"/>
+            <a:ext cx="11000000" cy="4000000"/>
           </a:xfrm>
           <a:prstGeom prst="rect">
             <a:avLst/>
@@ -6032,15 +8240,15 @@
               </a:spcAft>
             </a:pPr>
             <a:r>
-              <a:rPr sz="1400" b="0">
-                <a:solidFill>
-                  <a:srgbClr val="333333"/>
-                </a:solidFill>
-                <a:latin typeface="Open Sans"/>
-                <a:ea typeface="Open Sans"/>
-                <a:cs typeface="Open Sans"/>
-              </a:rPr>
-              <a:t>•  в ближайшую медицинскую организацию</a:t>
+              <a:rPr sz="1400" b="1">
+                <a:solidFill>
+                  <a:srgbClr val="CC0000"/>
+                </a:solidFill>
+                <a:latin typeface="Open Sans"/>
+                <a:ea typeface="Open Sans"/>
+                <a:cs typeface="Open Sans"/>
+              </a:rPr>
+              <a:t>•  Нарушено сознание или дыхание нестабильно</a:t>
             </a:r>
           </a:p>
           <a:p>
@@ -6050,15 +8258,15 @@
               </a:spcAft>
             </a:pPr>
             <a:r>
-              <a:rPr sz="1400" b="0">
-                <a:solidFill>
-                  <a:srgbClr val="333333"/>
-                </a:solidFill>
-                <a:latin typeface="Open Sans"/>
-                <a:ea typeface="Open Sans"/>
-                <a:cs typeface="Open Sans"/>
-              </a:rPr>
-              <a:t>•  в травматологический пункт при соответствующей травме</a:t>
+              <a:rPr sz="1400" b="1">
+                <a:solidFill>
+                  <a:srgbClr val="CC0000"/>
+                </a:solidFill>
+                <a:latin typeface="Open Sans"/>
+                <a:ea typeface="Open Sans"/>
+                <a:cs typeface="Open Sans"/>
+              </a:rPr>
+              <a:t>•  Есть массивное или продолжающееся кровотечение</a:t>
             </a:r>
           </a:p>
           <a:p>
@@ -6068,15 +8276,15 @@
               </a:spcAft>
             </a:pPr>
             <a:r>
-              <a:rPr sz="1400" b="0">
-                <a:solidFill>
-                  <a:srgbClr val="333333"/>
-                </a:solidFill>
-                <a:latin typeface="Open Sans"/>
-                <a:ea typeface="Open Sans"/>
-                <a:cs typeface="Open Sans"/>
-              </a:rPr>
-              <a:t>•  к месту, указанному диспетчером скорой помощи</a:t>
+              <a:rPr sz="1400" b="1">
+                <a:solidFill>
+                  <a:srgbClr val="CC0000"/>
+                </a:solidFill>
+                <a:latin typeface="Open Sans"/>
+                <a:ea typeface="Open Sans"/>
+                <a:cs typeface="Open Sans"/>
+              </a:rPr>
+              <a:t>•  Подозревается травма головы, шеи, позвоночника или таза</a:t>
             </a:r>
           </a:p>
           <a:p>
@@ -6086,15 +8294,33 @@
               </a:spcAft>
             </a:pPr>
             <a:r>
-              <a:rPr sz="1400" b="0">
-                <a:solidFill>
-                  <a:srgbClr val="333333"/>
-                </a:solidFill>
-                <a:latin typeface="Open Sans"/>
-                <a:ea typeface="Open Sans"/>
-                <a:cs typeface="Open Sans"/>
-              </a:rPr>
-              <a:t>•  по маршруту с минимальным риском задержки</a:t>
+              <a:rPr sz="1400" b="1">
+                <a:solidFill>
+                  <a:srgbClr val="CC0000"/>
+                </a:solidFill>
+                <a:latin typeface="Open Sans"/>
+                <a:ea typeface="Open Sans"/>
+                <a:cs typeface="Open Sans"/>
+              </a:rPr>
+              <a:t>•  Есть открытая травма груди или живота</a:t>
+            </a:r>
+          </a:p>
+          <a:p>
+            <a:pPr algn="l">
+              <a:spcAft>
+                <a:spcPts val="800"/>
+              </a:spcAft>
+            </a:pPr>
+            <a:r>
+              <a:rPr sz="1400" b="1">
+                <a:solidFill>
+                  <a:srgbClr val="CC0000"/>
+                </a:solidFill>
+                <a:latin typeface="Open Sans"/>
+                <a:ea typeface="Open Sans"/>
+                <a:cs typeface="Open Sans"/>
+              </a:rPr>
+              <a:t>•  Состояние быстро ухудшается или возможна реанимация</a:t>
             </a:r>
           </a:p>
         </p:txBody>
@@ -6166,7 +8392,7 @@
           <a:p>
             <a:pPr algn="l"/>
             <a:r>
-              <a:rPr sz="1300" b="0">
+              <a:rPr sz="1200" b="0">
                 <a:solidFill>
                   <a:srgbClr val="333333"/>
                 </a:solidFill>
@@ -6174,7 +8400,7 @@
                 <a:ea typeface="Open Sans"/>
                 <a:cs typeface="Open Sans"/>
               </a:rPr>
-              <a:t>Если связь доступна, уточните порядок действий у диспетчера.</a:t>
+              <a:t>В этих случаях предпочтительно не перемещать пострадавшего и дождаться профессиональной помощи, если место безопасно.</a:t>
             </a:r>
           </a:p>
         </p:txBody>
@@ -6272,7 +8498,7 @@
                 <a:ea typeface="Open Sans"/>
                 <a:cs typeface="Open Sans"/>
               </a:rPr>
-              <a:t>ПОДГОТОВКА К ТРАНСПОРТИРОВКЕ</a:t>
+              <a:t>КУДА ДОСТАВЛЯТЬ</a:t>
             </a:r>
           </a:p>
         </p:txBody>
@@ -6439,20 +8665,133 @@
       </p:sp>
       <p:sp>
         <p:nvSpPr>
-          <p:cNvPr id="8" name="Oval 7"/>
+          <p:cNvPr id="8" name="TextBox 7"/>
+          <p:cNvSpPr txBox="1"/>
+          <p:nvPr/>
+        </p:nvSpPr>
+        <p:spPr>
+          <a:xfrm>
+            <a:off x="700000" y="1450000"/>
+            <a:ext cx="11000000" cy="4000000"/>
+          </a:xfrm>
+          <a:prstGeom prst="rect">
+            <a:avLst/>
+          </a:prstGeom>
+          <a:noFill/>
+        </p:spPr>
+        <p:txBody>
+          <a:bodyPr wrap="square">
+            <a:spAutoFit/>
+          </a:bodyPr>
+          <a:lstStyle/>
+          <a:p>
+            <a:pPr algn="l">
+              <a:spcAft>
+                <a:spcPts val="800"/>
+              </a:spcAft>
+            </a:pPr>
+            <a:r>
+              <a:rPr sz="1400" b="0">
+                <a:solidFill>
+                  <a:srgbClr val="333333"/>
+                </a:solidFill>
+                <a:latin typeface="Open Sans"/>
+                <a:ea typeface="Open Sans"/>
+                <a:cs typeface="Open Sans"/>
+              </a:rPr>
+              <a:t>•  В ближайшую медицинскую организацию, способную оказать необходимую помощь.</a:t>
+            </a:r>
+          </a:p>
+          <a:p>
+            <a:pPr algn="l">
+              <a:spcAft>
+                <a:spcPts val="800"/>
+              </a:spcAft>
+            </a:pPr>
+            <a:r>
+              <a:rPr sz="1400" b="0">
+                <a:solidFill>
+                  <a:srgbClr val="333333"/>
+                </a:solidFill>
+                <a:latin typeface="Open Sans"/>
+                <a:ea typeface="Open Sans"/>
+                <a:cs typeface="Open Sans"/>
+              </a:rPr>
+              <a:t>•  В травматологический пункт — при подходящей по тяжести изолированной травме.</a:t>
+            </a:r>
+          </a:p>
+          <a:p>
+            <a:pPr algn="l">
+              <a:spcAft>
+                <a:spcPts val="800"/>
+              </a:spcAft>
+            </a:pPr>
+            <a:r>
+              <a:rPr sz="1400" b="0">
+                <a:solidFill>
+                  <a:srgbClr val="333333"/>
+                </a:solidFill>
+                <a:latin typeface="Open Sans"/>
+                <a:ea typeface="Open Sans"/>
+                <a:cs typeface="Open Sans"/>
+              </a:rPr>
+              <a:t>•  В учреждение, которое указал диспетчер скорой медицинской помощи.</a:t>
+            </a:r>
+          </a:p>
+          <a:p>
+            <a:pPr algn="l">
+              <a:spcAft>
+                <a:spcPts val="800"/>
+              </a:spcAft>
+            </a:pPr>
+            <a:r>
+              <a:rPr sz="1400" b="0">
+                <a:solidFill>
+                  <a:srgbClr val="333333"/>
+                </a:solidFill>
+                <a:latin typeface="Open Sans"/>
+                <a:ea typeface="Open Sans"/>
+                <a:cs typeface="Open Sans"/>
+              </a:rPr>
+              <a:t>•  По наиболее безопасному маршруту с минимальным риском задержки.</a:t>
+            </a:r>
+          </a:p>
+          <a:p>
+            <a:pPr algn="l">
+              <a:spcAft>
+                <a:spcPts val="800"/>
+              </a:spcAft>
+            </a:pPr>
+            <a:r>
+              <a:rPr sz="1400" b="0">
+                <a:solidFill>
+                  <a:srgbClr val="333333"/>
+                </a:solidFill>
+                <a:latin typeface="Open Sans"/>
+                <a:ea typeface="Open Sans"/>
+                <a:cs typeface="Open Sans"/>
+              </a:rPr>
+              <a:t>•  Не тратьте время на дальнюю поездку только из-за личных предпочтений.</a:t>
+            </a:r>
+          </a:p>
+        </p:txBody>
+      </p:sp>
+      <p:sp>
+        <p:nvSpPr>
+          <p:cNvPr id="9" name="Rounded Rectangle 8"/>
           <p:cNvSpPr/>
           <p:nvPr/>
         </p:nvSpPr>
         <p:spPr>
           <a:xfrm>
-            <a:off x="700000" y="1450000"/>
-            <a:ext cx="550000" cy="550000"/>
-          </a:xfrm>
-          <a:prstGeom prst="ellipse">
+            <a:off x="700000" y="5600000"/>
+            <a:ext cx="11000000" cy="1000000"/>
+          </a:xfrm>
+          <a:prstGeom prst="roundRect">
             <a:avLst/>
           </a:prstGeom>
           <a:solidFill>
-            <a:srgbClr val="CC0000"/>
+            <a:srgbClr val="F5F0E1"/>
           </a:solidFill>
           <a:ln>
             <a:noFill/>
@@ -6482,14 +8821,14 @@
       </p:sp>
       <p:sp>
         <p:nvSpPr>
-          <p:cNvPr id="9" name="TextBox 8"/>
+          <p:cNvPr id="10" name="TextBox 9"/>
           <p:cNvSpPr txBox="1"/>
           <p:nvPr/>
         </p:nvSpPr>
         <p:spPr>
           <a:xfrm>
-            <a:off x="700000" y="1450000"/>
-            <a:ext cx="550000" cy="550000"/>
+            <a:off x="950000" y="5800000"/>
+            <a:ext cx="10500000" cy="600000"/>
           </a:xfrm>
           <a:prstGeom prst="rect">
             <a:avLst/>
@@ -6502,91 +8841,9 @@
           </a:bodyPr>
           <a:lstStyle/>
           <a:p>
-            <a:pPr algn="ctr"/>
-            <a:r>
-              <a:rPr sz="1400" b="1">
-                <a:solidFill>
-                  <a:srgbClr val="FFFFFF"/>
-                </a:solidFill>
-                <a:latin typeface="Open Sans"/>
-                <a:ea typeface="Open Sans"/>
-                <a:cs typeface="Open Sans"/>
-              </a:rPr>
-              <a:t>1</a:t>
-            </a:r>
-          </a:p>
-        </p:txBody>
-      </p:sp>
-      <p:sp>
-        <p:nvSpPr>
-          <p:cNvPr id="10" name="Rectangle 9"/>
-          <p:cNvSpPr/>
-          <p:nvPr/>
-        </p:nvSpPr>
-        <p:spPr>
-          <a:xfrm>
-            <a:off x="1450000" y="1450000"/>
-            <a:ext cx="10500000" cy="550000"/>
-          </a:xfrm>
-          <a:prstGeom prst="rect">
-            <a:avLst/>
-          </a:prstGeom>
-          <a:solidFill>
-            <a:srgbClr val="FFFFFF"/>
-          </a:solidFill>
-          <a:ln w="12700">
-            <a:solidFill>
-              <a:srgbClr val="999999"/>
-            </a:solidFill>
-          </a:ln>
-        </p:spPr>
-        <p:style>
-          <a:lnRef idx="1">
-            <a:schemeClr val="accent1"/>
-          </a:lnRef>
-          <a:fillRef idx="3">
-            <a:schemeClr val="accent1"/>
-          </a:fillRef>
-          <a:effectRef idx="2">
-            <a:schemeClr val="accent1"/>
-          </a:effectRef>
-          <a:fontRef idx="minor">
-            <a:schemeClr val="lt1"/>
-          </a:fontRef>
-        </p:style>
-        <p:txBody>
-          <a:bodyPr rtlCol="0" anchor="ctr"/>
-          <a:lstStyle/>
-          <a:p>
-            <a:pPr algn="ctr"/>
-          </a:p>
-        </p:txBody>
-      </p:sp>
-      <p:sp>
-        <p:nvSpPr>
-          <p:cNvPr id="11" name="TextBox 10"/>
-          <p:cNvSpPr txBox="1"/>
-          <p:nvPr/>
-        </p:nvSpPr>
-        <p:spPr>
-          <a:xfrm>
-            <a:off x="1650000" y="1450000"/>
-            <a:ext cx="10100000" cy="550000"/>
-          </a:xfrm>
-          <a:prstGeom prst="rect">
-            <a:avLst/>
-          </a:prstGeom>
-          <a:noFill/>
-        </p:spPr>
-        <p:txBody>
-          <a:bodyPr wrap="square" anchor="ctr">
-            <a:spAutoFit/>
-          </a:bodyPr>
-          <a:lstStyle/>
-          <a:p>
             <a:pPr algn="l"/>
             <a:r>
-              <a:rPr sz="1300" b="0">
+              <a:rPr sz="1200" b="0">
                 <a:solidFill>
                   <a:srgbClr val="333333"/>
                 </a:solidFill>
@@ -6594,817 +8851,7 @@
                 <a:ea typeface="Open Sans"/>
                 <a:cs typeface="Open Sans"/>
               </a:rPr>
-              <a:t>Остановите кровотечение и закройте раны.</a:t>
-            </a:r>
-          </a:p>
-        </p:txBody>
-      </p:sp>
-      <p:sp>
-        <p:nvSpPr>
-          <p:cNvPr id="12" name="Oval 11"/>
-          <p:cNvSpPr/>
-          <p:nvPr/>
-        </p:nvSpPr>
-        <p:spPr>
-          <a:xfrm>
-            <a:off x="700000" y="2320000"/>
-            <a:ext cx="550000" cy="550000"/>
-          </a:xfrm>
-          <a:prstGeom prst="ellipse">
-            <a:avLst/>
-          </a:prstGeom>
-          <a:solidFill>
-            <a:srgbClr val="555555"/>
-          </a:solidFill>
-          <a:ln>
-            <a:noFill/>
-          </a:ln>
-        </p:spPr>
-        <p:style>
-          <a:lnRef idx="1">
-            <a:schemeClr val="accent1"/>
-          </a:lnRef>
-          <a:fillRef idx="3">
-            <a:schemeClr val="accent1"/>
-          </a:fillRef>
-          <a:effectRef idx="2">
-            <a:schemeClr val="accent1"/>
-          </a:effectRef>
-          <a:fontRef idx="minor">
-            <a:schemeClr val="lt1"/>
-          </a:fontRef>
-        </p:style>
-        <p:txBody>
-          <a:bodyPr rtlCol="0" anchor="ctr"/>
-          <a:lstStyle/>
-          <a:p>
-            <a:pPr algn="ctr"/>
-          </a:p>
-        </p:txBody>
-      </p:sp>
-      <p:sp>
-        <p:nvSpPr>
-          <p:cNvPr id="13" name="TextBox 12"/>
-          <p:cNvSpPr txBox="1"/>
-          <p:nvPr/>
-        </p:nvSpPr>
-        <p:spPr>
-          <a:xfrm>
-            <a:off x="700000" y="2320000"/>
-            <a:ext cx="550000" cy="550000"/>
-          </a:xfrm>
-          <a:prstGeom prst="rect">
-            <a:avLst/>
-          </a:prstGeom>
-          <a:noFill/>
-        </p:spPr>
-        <p:txBody>
-          <a:bodyPr wrap="square" anchor="ctr">
-            <a:spAutoFit/>
-          </a:bodyPr>
-          <a:lstStyle/>
-          <a:p>
-            <a:pPr algn="ctr"/>
-            <a:r>
-              <a:rPr sz="1400" b="1">
-                <a:solidFill>
-                  <a:srgbClr val="FFFFFF"/>
-                </a:solidFill>
-                <a:latin typeface="Open Sans"/>
-                <a:ea typeface="Open Sans"/>
-                <a:cs typeface="Open Sans"/>
-              </a:rPr>
-              <a:t>2</a:t>
-            </a:r>
-          </a:p>
-        </p:txBody>
-      </p:sp>
-      <p:sp>
-        <p:nvSpPr>
-          <p:cNvPr id="14" name="Rectangle 13"/>
-          <p:cNvSpPr/>
-          <p:nvPr/>
-        </p:nvSpPr>
-        <p:spPr>
-          <a:xfrm>
-            <a:off x="1450000" y="2320000"/>
-            <a:ext cx="10500000" cy="550000"/>
-          </a:xfrm>
-          <a:prstGeom prst="rect">
-            <a:avLst/>
-          </a:prstGeom>
-          <a:solidFill>
-            <a:srgbClr val="FFFFFF"/>
-          </a:solidFill>
-          <a:ln w="12700">
-            <a:solidFill>
-              <a:srgbClr val="999999"/>
-            </a:solidFill>
-          </a:ln>
-        </p:spPr>
-        <p:style>
-          <a:lnRef idx="1">
-            <a:schemeClr val="accent1"/>
-          </a:lnRef>
-          <a:fillRef idx="3">
-            <a:schemeClr val="accent1"/>
-          </a:fillRef>
-          <a:effectRef idx="2">
-            <a:schemeClr val="accent1"/>
-          </a:effectRef>
-          <a:fontRef idx="minor">
-            <a:schemeClr val="lt1"/>
-          </a:fontRef>
-        </p:style>
-        <p:txBody>
-          <a:bodyPr rtlCol="0" anchor="ctr"/>
-          <a:lstStyle/>
-          <a:p>
-            <a:pPr algn="ctr"/>
-          </a:p>
-        </p:txBody>
-      </p:sp>
-      <p:sp>
-        <p:nvSpPr>
-          <p:cNvPr id="15" name="TextBox 14"/>
-          <p:cNvSpPr txBox="1"/>
-          <p:nvPr/>
-        </p:nvSpPr>
-        <p:spPr>
-          <a:xfrm>
-            <a:off x="1650000" y="2320000"/>
-            <a:ext cx="10100000" cy="550000"/>
-          </a:xfrm>
-          <a:prstGeom prst="rect">
-            <a:avLst/>
-          </a:prstGeom>
-          <a:noFill/>
-        </p:spPr>
-        <p:txBody>
-          <a:bodyPr wrap="square" anchor="ctr">
-            <a:spAutoFit/>
-          </a:bodyPr>
-          <a:lstStyle/>
-          <a:p>
-            <a:pPr algn="l"/>
-            <a:r>
-              <a:rPr sz="1300" b="0">
-                <a:solidFill>
-                  <a:srgbClr val="333333"/>
-                </a:solidFill>
-                <a:latin typeface="Open Sans"/>
-                <a:ea typeface="Open Sans"/>
-                <a:cs typeface="Open Sans"/>
-              </a:rPr>
-              <a:t>Обездвижьте предполагаемые переломы.</a:t>
-            </a:r>
-          </a:p>
-        </p:txBody>
-      </p:sp>
-      <p:sp>
-        <p:nvSpPr>
-          <p:cNvPr id="16" name="Oval 15"/>
-          <p:cNvSpPr/>
-          <p:nvPr/>
-        </p:nvSpPr>
-        <p:spPr>
-          <a:xfrm>
-            <a:off x="700000" y="3190000"/>
-            <a:ext cx="550000" cy="550000"/>
-          </a:xfrm>
-          <a:prstGeom prst="ellipse">
-            <a:avLst/>
-          </a:prstGeom>
-          <a:solidFill>
-            <a:srgbClr val="555555"/>
-          </a:solidFill>
-          <a:ln>
-            <a:noFill/>
-          </a:ln>
-        </p:spPr>
-        <p:style>
-          <a:lnRef idx="1">
-            <a:schemeClr val="accent1"/>
-          </a:lnRef>
-          <a:fillRef idx="3">
-            <a:schemeClr val="accent1"/>
-          </a:fillRef>
-          <a:effectRef idx="2">
-            <a:schemeClr val="accent1"/>
-          </a:effectRef>
-          <a:fontRef idx="minor">
-            <a:schemeClr val="lt1"/>
-          </a:fontRef>
-        </p:style>
-        <p:txBody>
-          <a:bodyPr rtlCol="0" anchor="ctr"/>
-          <a:lstStyle/>
-          <a:p>
-            <a:pPr algn="ctr"/>
-          </a:p>
-        </p:txBody>
-      </p:sp>
-      <p:sp>
-        <p:nvSpPr>
-          <p:cNvPr id="17" name="TextBox 16"/>
-          <p:cNvSpPr txBox="1"/>
-          <p:nvPr/>
-        </p:nvSpPr>
-        <p:spPr>
-          <a:xfrm>
-            <a:off x="700000" y="3190000"/>
-            <a:ext cx="550000" cy="550000"/>
-          </a:xfrm>
-          <a:prstGeom prst="rect">
-            <a:avLst/>
-          </a:prstGeom>
-          <a:noFill/>
-        </p:spPr>
-        <p:txBody>
-          <a:bodyPr wrap="square" anchor="ctr">
-            <a:spAutoFit/>
-          </a:bodyPr>
-          <a:lstStyle/>
-          <a:p>
-            <a:pPr algn="ctr"/>
-            <a:r>
-              <a:rPr sz="1400" b="1">
-                <a:solidFill>
-                  <a:srgbClr val="FFFFFF"/>
-                </a:solidFill>
-                <a:latin typeface="Open Sans"/>
-                <a:ea typeface="Open Sans"/>
-                <a:cs typeface="Open Sans"/>
-              </a:rPr>
-              <a:t>3</a:t>
-            </a:r>
-          </a:p>
-        </p:txBody>
-      </p:sp>
-      <p:sp>
-        <p:nvSpPr>
-          <p:cNvPr id="18" name="Rectangle 17"/>
-          <p:cNvSpPr/>
-          <p:nvPr/>
-        </p:nvSpPr>
-        <p:spPr>
-          <a:xfrm>
-            <a:off x="1450000" y="3190000"/>
-            <a:ext cx="10500000" cy="550000"/>
-          </a:xfrm>
-          <a:prstGeom prst="rect">
-            <a:avLst/>
-          </a:prstGeom>
-          <a:solidFill>
-            <a:srgbClr val="FFFFFF"/>
-          </a:solidFill>
-          <a:ln w="12700">
-            <a:solidFill>
-              <a:srgbClr val="999999"/>
-            </a:solidFill>
-          </a:ln>
-        </p:spPr>
-        <p:style>
-          <a:lnRef idx="1">
-            <a:schemeClr val="accent1"/>
-          </a:lnRef>
-          <a:fillRef idx="3">
-            <a:schemeClr val="accent1"/>
-          </a:fillRef>
-          <a:effectRef idx="2">
-            <a:schemeClr val="accent1"/>
-          </a:effectRef>
-          <a:fontRef idx="minor">
-            <a:schemeClr val="lt1"/>
-          </a:fontRef>
-        </p:style>
-        <p:txBody>
-          <a:bodyPr rtlCol="0" anchor="ctr"/>
-          <a:lstStyle/>
-          <a:p>
-            <a:pPr algn="ctr"/>
-          </a:p>
-        </p:txBody>
-      </p:sp>
-      <p:sp>
-        <p:nvSpPr>
-          <p:cNvPr id="19" name="TextBox 18"/>
-          <p:cNvSpPr txBox="1"/>
-          <p:nvPr/>
-        </p:nvSpPr>
-        <p:spPr>
-          <a:xfrm>
-            <a:off x="1650000" y="3190000"/>
-            <a:ext cx="10100000" cy="550000"/>
-          </a:xfrm>
-          <a:prstGeom prst="rect">
-            <a:avLst/>
-          </a:prstGeom>
-          <a:noFill/>
-        </p:spPr>
-        <p:txBody>
-          <a:bodyPr wrap="square" anchor="ctr">
-            <a:spAutoFit/>
-          </a:bodyPr>
-          <a:lstStyle/>
-          <a:p>
-            <a:pPr algn="l"/>
-            <a:r>
-              <a:rPr sz="1300" b="0">
-                <a:solidFill>
-                  <a:srgbClr val="333333"/>
-                </a:solidFill>
-                <a:latin typeface="Open Sans"/>
-                <a:ea typeface="Open Sans"/>
-                <a:cs typeface="Open Sans"/>
-              </a:rPr>
-              <a:t>Выберите безопасное положение.</a:t>
-            </a:r>
-          </a:p>
-        </p:txBody>
-      </p:sp>
-      <p:sp>
-        <p:nvSpPr>
-          <p:cNvPr id="20" name="Oval 19"/>
-          <p:cNvSpPr/>
-          <p:nvPr/>
-        </p:nvSpPr>
-        <p:spPr>
-          <a:xfrm>
-            <a:off x="700000" y="4060000"/>
-            <a:ext cx="550000" cy="550000"/>
-          </a:xfrm>
-          <a:prstGeom prst="ellipse">
-            <a:avLst/>
-          </a:prstGeom>
-          <a:solidFill>
-            <a:srgbClr val="555555"/>
-          </a:solidFill>
-          <a:ln>
-            <a:noFill/>
-          </a:ln>
-        </p:spPr>
-        <p:style>
-          <a:lnRef idx="1">
-            <a:schemeClr val="accent1"/>
-          </a:lnRef>
-          <a:fillRef idx="3">
-            <a:schemeClr val="accent1"/>
-          </a:fillRef>
-          <a:effectRef idx="2">
-            <a:schemeClr val="accent1"/>
-          </a:effectRef>
-          <a:fontRef idx="minor">
-            <a:schemeClr val="lt1"/>
-          </a:fontRef>
-        </p:style>
-        <p:txBody>
-          <a:bodyPr rtlCol="0" anchor="ctr"/>
-          <a:lstStyle/>
-          <a:p>
-            <a:pPr algn="ctr"/>
-          </a:p>
-        </p:txBody>
-      </p:sp>
-      <p:sp>
-        <p:nvSpPr>
-          <p:cNvPr id="21" name="TextBox 20"/>
-          <p:cNvSpPr txBox="1"/>
-          <p:nvPr/>
-        </p:nvSpPr>
-        <p:spPr>
-          <a:xfrm>
-            <a:off x="700000" y="4060000"/>
-            <a:ext cx="550000" cy="550000"/>
-          </a:xfrm>
-          <a:prstGeom prst="rect">
-            <a:avLst/>
-          </a:prstGeom>
-          <a:noFill/>
-        </p:spPr>
-        <p:txBody>
-          <a:bodyPr wrap="square" anchor="ctr">
-            <a:spAutoFit/>
-          </a:bodyPr>
-          <a:lstStyle/>
-          <a:p>
-            <a:pPr algn="ctr"/>
-            <a:r>
-              <a:rPr sz="1400" b="1">
-                <a:solidFill>
-                  <a:srgbClr val="FFFFFF"/>
-                </a:solidFill>
-                <a:latin typeface="Open Sans"/>
-                <a:ea typeface="Open Sans"/>
-                <a:cs typeface="Open Sans"/>
-              </a:rPr>
-              <a:t>4</a:t>
-            </a:r>
-          </a:p>
-        </p:txBody>
-      </p:sp>
-      <p:sp>
-        <p:nvSpPr>
-          <p:cNvPr id="22" name="Rectangle 21"/>
-          <p:cNvSpPr/>
-          <p:nvPr/>
-        </p:nvSpPr>
-        <p:spPr>
-          <a:xfrm>
-            <a:off x="1450000" y="4060000"/>
-            <a:ext cx="10500000" cy="550000"/>
-          </a:xfrm>
-          <a:prstGeom prst="rect">
-            <a:avLst/>
-          </a:prstGeom>
-          <a:solidFill>
-            <a:srgbClr val="FFFFFF"/>
-          </a:solidFill>
-          <a:ln w="12700">
-            <a:solidFill>
-              <a:srgbClr val="999999"/>
-            </a:solidFill>
-          </a:ln>
-        </p:spPr>
-        <p:style>
-          <a:lnRef idx="1">
-            <a:schemeClr val="accent1"/>
-          </a:lnRef>
-          <a:fillRef idx="3">
-            <a:schemeClr val="accent1"/>
-          </a:fillRef>
-          <a:effectRef idx="2">
-            <a:schemeClr val="accent1"/>
-          </a:effectRef>
-          <a:fontRef idx="minor">
-            <a:schemeClr val="lt1"/>
-          </a:fontRef>
-        </p:style>
-        <p:txBody>
-          <a:bodyPr rtlCol="0" anchor="ctr"/>
-          <a:lstStyle/>
-          <a:p>
-            <a:pPr algn="ctr"/>
-          </a:p>
-        </p:txBody>
-      </p:sp>
-      <p:sp>
-        <p:nvSpPr>
-          <p:cNvPr id="23" name="TextBox 22"/>
-          <p:cNvSpPr txBox="1"/>
-          <p:nvPr/>
-        </p:nvSpPr>
-        <p:spPr>
-          <a:xfrm>
-            <a:off x="1650000" y="4060000"/>
-            <a:ext cx="10100000" cy="550000"/>
-          </a:xfrm>
-          <a:prstGeom prst="rect">
-            <a:avLst/>
-          </a:prstGeom>
-          <a:noFill/>
-        </p:spPr>
-        <p:txBody>
-          <a:bodyPr wrap="square" anchor="ctr">
-            <a:spAutoFit/>
-          </a:bodyPr>
-          <a:lstStyle/>
-          <a:p>
-            <a:pPr algn="l"/>
-            <a:r>
-              <a:rPr sz="1300" b="0">
-                <a:solidFill>
-                  <a:srgbClr val="333333"/>
-                </a:solidFill>
-                <a:latin typeface="Open Sans"/>
-                <a:ea typeface="Open Sans"/>
-                <a:cs typeface="Open Sans"/>
-              </a:rPr>
-              <a:t>Укройте пострадавшего и обеспечьте удобство.</a:t>
-            </a:r>
-          </a:p>
-        </p:txBody>
-      </p:sp>
-      <p:sp>
-        <p:nvSpPr>
-          <p:cNvPr id="24" name="Oval 23"/>
-          <p:cNvSpPr/>
-          <p:nvPr/>
-        </p:nvSpPr>
-        <p:spPr>
-          <a:xfrm>
-            <a:off x="700000" y="4930000"/>
-            <a:ext cx="550000" cy="550000"/>
-          </a:xfrm>
-          <a:prstGeom prst="ellipse">
-            <a:avLst/>
-          </a:prstGeom>
-          <a:solidFill>
-            <a:srgbClr val="555555"/>
-          </a:solidFill>
-          <a:ln>
-            <a:noFill/>
-          </a:ln>
-        </p:spPr>
-        <p:style>
-          <a:lnRef idx="1">
-            <a:schemeClr val="accent1"/>
-          </a:lnRef>
-          <a:fillRef idx="3">
-            <a:schemeClr val="accent1"/>
-          </a:fillRef>
-          <a:effectRef idx="2">
-            <a:schemeClr val="accent1"/>
-          </a:effectRef>
-          <a:fontRef idx="minor">
-            <a:schemeClr val="lt1"/>
-          </a:fontRef>
-        </p:style>
-        <p:txBody>
-          <a:bodyPr rtlCol="0" anchor="ctr"/>
-          <a:lstStyle/>
-          <a:p>
-            <a:pPr algn="ctr"/>
-          </a:p>
-        </p:txBody>
-      </p:sp>
-      <p:sp>
-        <p:nvSpPr>
-          <p:cNvPr id="25" name="TextBox 24"/>
-          <p:cNvSpPr txBox="1"/>
-          <p:nvPr/>
-        </p:nvSpPr>
-        <p:spPr>
-          <a:xfrm>
-            <a:off x="700000" y="4930000"/>
-            <a:ext cx="550000" cy="550000"/>
-          </a:xfrm>
-          <a:prstGeom prst="rect">
-            <a:avLst/>
-          </a:prstGeom>
-          <a:noFill/>
-        </p:spPr>
-        <p:txBody>
-          <a:bodyPr wrap="square" anchor="ctr">
-            <a:spAutoFit/>
-          </a:bodyPr>
-          <a:lstStyle/>
-          <a:p>
-            <a:pPr algn="ctr"/>
-            <a:r>
-              <a:rPr sz="1400" b="1">
-                <a:solidFill>
-                  <a:srgbClr val="FFFFFF"/>
-                </a:solidFill>
-                <a:latin typeface="Open Sans"/>
-                <a:ea typeface="Open Sans"/>
-                <a:cs typeface="Open Sans"/>
-              </a:rPr>
-              <a:t>5</a:t>
-            </a:r>
-          </a:p>
-        </p:txBody>
-      </p:sp>
-      <p:sp>
-        <p:nvSpPr>
-          <p:cNvPr id="26" name="Rectangle 25"/>
-          <p:cNvSpPr/>
-          <p:nvPr/>
-        </p:nvSpPr>
-        <p:spPr>
-          <a:xfrm>
-            <a:off x="1450000" y="4930000"/>
-            <a:ext cx="10500000" cy="550000"/>
-          </a:xfrm>
-          <a:prstGeom prst="rect">
-            <a:avLst/>
-          </a:prstGeom>
-          <a:solidFill>
-            <a:srgbClr val="FFFFFF"/>
-          </a:solidFill>
-          <a:ln w="12700">
-            <a:solidFill>
-              <a:srgbClr val="999999"/>
-            </a:solidFill>
-          </a:ln>
-        </p:spPr>
-        <p:style>
-          <a:lnRef idx="1">
-            <a:schemeClr val="accent1"/>
-          </a:lnRef>
-          <a:fillRef idx="3">
-            <a:schemeClr val="accent1"/>
-          </a:fillRef>
-          <a:effectRef idx="2">
-            <a:schemeClr val="accent1"/>
-          </a:effectRef>
-          <a:fontRef idx="minor">
-            <a:schemeClr val="lt1"/>
-          </a:fontRef>
-        </p:style>
-        <p:txBody>
-          <a:bodyPr rtlCol="0" anchor="ctr"/>
-          <a:lstStyle/>
-          <a:p>
-            <a:pPr algn="ctr"/>
-          </a:p>
-        </p:txBody>
-      </p:sp>
-      <p:sp>
-        <p:nvSpPr>
-          <p:cNvPr id="27" name="TextBox 26"/>
-          <p:cNvSpPr txBox="1"/>
-          <p:nvPr/>
-        </p:nvSpPr>
-        <p:spPr>
-          <a:xfrm>
-            <a:off x="1650000" y="4930000"/>
-            <a:ext cx="10100000" cy="550000"/>
-          </a:xfrm>
-          <a:prstGeom prst="rect">
-            <a:avLst/>
-          </a:prstGeom>
-          <a:noFill/>
-        </p:spPr>
-        <p:txBody>
-          <a:bodyPr wrap="square" anchor="ctr">
-            <a:spAutoFit/>
-          </a:bodyPr>
-          <a:lstStyle/>
-          <a:p>
-            <a:pPr algn="l"/>
-            <a:r>
-              <a:rPr sz="1300" b="0">
-                <a:solidFill>
-                  <a:srgbClr val="333333"/>
-                </a:solidFill>
-                <a:latin typeface="Open Sans"/>
-                <a:ea typeface="Open Sans"/>
-                <a:cs typeface="Open Sans"/>
-              </a:rPr>
-              <a:t>Подготовьте сведения о происшествии и помощи.</a:t>
-            </a:r>
-          </a:p>
-        </p:txBody>
-      </p:sp>
-      <p:sp>
-        <p:nvSpPr>
-          <p:cNvPr id="28" name="Oval 27"/>
-          <p:cNvSpPr/>
-          <p:nvPr/>
-        </p:nvSpPr>
-        <p:spPr>
-          <a:xfrm>
-            <a:off x="700000" y="5800000"/>
-            <a:ext cx="550000" cy="550000"/>
-          </a:xfrm>
-          <a:prstGeom prst="ellipse">
-            <a:avLst/>
-          </a:prstGeom>
-          <a:solidFill>
-            <a:srgbClr val="555555"/>
-          </a:solidFill>
-          <a:ln>
-            <a:noFill/>
-          </a:ln>
-        </p:spPr>
-        <p:style>
-          <a:lnRef idx="1">
-            <a:schemeClr val="accent1"/>
-          </a:lnRef>
-          <a:fillRef idx="3">
-            <a:schemeClr val="accent1"/>
-          </a:fillRef>
-          <a:effectRef idx="2">
-            <a:schemeClr val="accent1"/>
-          </a:effectRef>
-          <a:fontRef idx="minor">
-            <a:schemeClr val="lt1"/>
-          </a:fontRef>
-        </p:style>
-        <p:txBody>
-          <a:bodyPr rtlCol="0" anchor="ctr"/>
-          <a:lstStyle/>
-          <a:p>
-            <a:pPr algn="ctr"/>
-          </a:p>
-        </p:txBody>
-      </p:sp>
-      <p:sp>
-        <p:nvSpPr>
-          <p:cNvPr id="29" name="TextBox 28"/>
-          <p:cNvSpPr txBox="1"/>
-          <p:nvPr/>
-        </p:nvSpPr>
-        <p:spPr>
-          <a:xfrm>
-            <a:off x="700000" y="5800000"/>
-            <a:ext cx="550000" cy="550000"/>
-          </a:xfrm>
-          <a:prstGeom prst="rect">
-            <a:avLst/>
-          </a:prstGeom>
-          <a:noFill/>
-        </p:spPr>
-        <p:txBody>
-          <a:bodyPr wrap="square" anchor="ctr">
-            <a:spAutoFit/>
-          </a:bodyPr>
-          <a:lstStyle/>
-          <a:p>
-            <a:pPr algn="ctr"/>
-            <a:r>
-              <a:rPr sz="1400" b="1">
-                <a:solidFill>
-                  <a:srgbClr val="FFFFFF"/>
-                </a:solidFill>
-                <a:latin typeface="Open Sans"/>
-                <a:ea typeface="Open Sans"/>
-                <a:cs typeface="Open Sans"/>
-              </a:rPr>
-              <a:t>6</a:t>
-            </a:r>
-          </a:p>
-        </p:txBody>
-      </p:sp>
-      <p:sp>
-        <p:nvSpPr>
-          <p:cNvPr id="30" name="Rectangle 29"/>
-          <p:cNvSpPr/>
-          <p:nvPr/>
-        </p:nvSpPr>
-        <p:spPr>
-          <a:xfrm>
-            <a:off x="1450000" y="5800000"/>
-            <a:ext cx="10500000" cy="550000"/>
-          </a:xfrm>
-          <a:prstGeom prst="rect">
-            <a:avLst/>
-          </a:prstGeom>
-          <a:solidFill>
-            <a:srgbClr val="FFFFFF"/>
-          </a:solidFill>
-          <a:ln w="12700">
-            <a:solidFill>
-              <a:srgbClr val="999999"/>
-            </a:solidFill>
-          </a:ln>
-        </p:spPr>
-        <p:style>
-          <a:lnRef idx="1">
-            <a:schemeClr val="accent1"/>
-          </a:lnRef>
-          <a:fillRef idx="3">
-            <a:schemeClr val="accent1"/>
-          </a:fillRef>
-          <a:effectRef idx="2">
-            <a:schemeClr val="accent1"/>
-          </a:effectRef>
-          <a:fontRef idx="minor">
-            <a:schemeClr val="lt1"/>
-          </a:fontRef>
-        </p:style>
-        <p:txBody>
-          <a:bodyPr rtlCol="0" anchor="ctr"/>
-          <a:lstStyle/>
-          <a:p>
-            <a:pPr algn="ctr"/>
-          </a:p>
-        </p:txBody>
-      </p:sp>
-      <p:sp>
-        <p:nvSpPr>
-          <p:cNvPr id="31" name="TextBox 30"/>
-          <p:cNvSpPr txBox="1"/>
-          <p:nvPr/>
-        </p:nvSpPr>
-        <p:spPr>
-          <a:xfrm>
-            <a:off x="1650000" y="5800000"/>
-            <a:ext cx="10100000" cy="550000"/>
-          </a:xfrm>
-          <a:prstGeom prst="rect">
-            <a:avLst/>
-          </a:prstGeom>
-          <a:noFill/>
-        </p:spPr>
-        <p:txBody>
-          <a:bodyPr wrap="square" anchor="ctr">
-            <a:spAutoFit/>
-          </a:bodyPr>
-          <a:lstStyle/>
-          <a:p>
-            <a:pPr algn="l"/>
-            <a:r>
-              <a:rPr sz="1300" b="0">
-                <a:solidFill>
-                  <a:srgbClr val="333333"/>
-                </a:solidFill>
-                <a:latin typeface="Open Sans"/>
-                <a:ea typeface="Open Sans"/>
-                <a:cs typeface="Open Sans"/>
-              </a:rPr>
-              <a:t>По возможности обеспечьте сопровождающего.</a:t>
+              <a:t>Заранее уточните адрес, подъезд, приемное отделение и возможность немедленного приема.</a:t>
             </a:r>
           </a:p>
         </p:txBody>
@@ -7502,7 +8949,7 @@
                 <a:ea typeface="Open Sans"/>
                 <a:cs typeface="Open Sans"/>
               </a:rPr>
-              <a:t>ВО ВРЕМЯ ПУТИ</a:t>
+              <a:t>ПОДГОТОВКА ПЕРЕД ДОРОГОЙ</a:t>
             </a:r>
           </a:p>
         </p:txBody>
@@ -7669,14 +9116,57 @@
       </p:sp>
       <p:sp>
         <p:nvSpPr>
-          <p:cNvPr id="8" name="TextBox 7"/>
+          <p:cNvPr id="8" name="Oval 7"/>
+          <p:cNvSpPr/>
+          <p:nvPr/>
+        </p:nvSpPr>
+        <p:spPr>
+          <a:xfrm>
+            <a:off x="700000" y="1400000"/>
+            <a:ext cx="500000" cy="500000"/>
+          </a:xfrm>
+          <a:prstGeom prst="ellipse">
+            <a:avLst/>
+          </a:prstGeom>
+          <a:solidFill>
+            <a:srgbClr val="CC0000"/>
+          </a:solidFill>
+          <a:ln>
+            <a:noFill/>
+          </a:ln>
+        </p:spPr>
+        <p:style>
+          <a:lnRef idx="1">
+            <a:schemeClr val="accent1"/>
+          </a:lnRef>
+          <a:fillRef idx="3">
+            <a:schemeClr val="accent1"/>
+          </a:fillRef>
+          <a:effectRef idx="2">
+            <a:schemeClr val="accent1"/>
+          </a:effectRef>
+          <a:fontRef idx="minor">
+            <a:schemeClr val="lt1"/>
+          </a:fontRef>
+        </p:style>
+        <p:txBody>
+          <a:bodyPr rtlCol="0" anchor="ctr"/>
+          <a:lstStyle/>
+          <a:p>
+            <a:pPr algn="ctr"/>
+          </a:p>
+        </p:txBody>
+      </p:sp>
+      <p:sp>
+        <p:nvSpPr>
+          <p:cNvPr id="9" name="TextBox 8"/>
           <p:cNvSpPr txBox="1"/>
           <p:nvPr/>
         </p:nvSpPr>
         <p:spPr>
           <a:xfrm>
-            <a:off x="700000" y="1500000"/>
-            <a:ext cx="11000000" cy="4200000"/>
+            <a:off x="700000" y="1400000"/>
+            <a:ext cx="500000" cy="500000"/>
           </a:xfrm>
           <a:prstGeom prst="rect">
             <a:avLst/>
@@ -7684,18 +9174,96 @@
           <a:noFill/>
         </p:spPr>
         <p:txBody>
-          <a:bodyPr wrap="square">
+          <a:bodyPr wrap="square" anchor="ctr">
             <a:spAutoFit/>
           </a:bodyPr>
           <a:lstStyle/>
           <a:p>
-            <a:pPr algn="l">
-              <a:spcAft>
-                <a:spcPts val="800"/>
-              </a:spcAft>
-            </a:pPr>
-            <a:r>
-              <a:rPr sz="1400" b="0">
+            <a:pPr algn="ctr"/>
+            <a:r>
+              <a:rPr sz="1300" b="1">
+                <a:solidFill>
+                  <a:srgbClr val="FFFFFF"/>
+                </a:solidFill>
+                <a:latin typeface="Open Sans"/>
+                <a:ea typeface="Open Sans"/>
+                <a:cs typeface="Open Sans"/>
+              </a:rPr>
+              <a:t>1</a:t>
+            </a:r>
+          </a:p>
+        </p:txBody>
+      </p:sp>
+      <p:sp>
+        <p:nvSpPr>
+          <p:cNvPr id="10" name="Rectangle 9"/>
+          <p:cNvSpPr/>
+          <p:nvPr/>
+        </p:nvSpPr>
+        <p:spPr>
+          <a:xfrm>
+            <a:off x="1400000" y="1400000"/>
+            <a:ext cx="10550000" cy="620000"/>
+          </a:xfrm>
+          <a:prstGeom prst="rect">
+            <a:avLst/>
+          </a:prstGeom>
+          <a:solidFill>
+            <a:srgbClr val="FFFFFF"/>
+          </a:solidFill>
+          <a:ln w="12700">
+            <a:solidFill>
+              <a:srgbClr val="999999"/>
+            </a:solidFill>
+          </a:ln>
+        </p:spPr>
+        <p:style>
+          <a:lnRef idx="1">
+            <a:schemeClr val="accent1"/>
+          </a:lnRef>
+          <a:fillRef idx="3">
+            <a:schemeClr val="accent1"/>
+          </a:fillRef>
+          <a:effectRef idx="2">
+            <a:schemeClr val="accent1"/>
+          </a:effectRef>
+          <a:fontRef idx="minor">
+            <a:schemeClr val="lt1"/>
+          </a:fontRef>
+        </p:style>
+        <p:txBody>
+          <a:bodyPr rtlCol="0" anchor="ctr"/>
+          <a:lstStyle/>
+          <a:p>
+            <a:pPr algn="ctr"/>
+          </a:p>
+        </p:txBody>
+      </p:sp>
+      <p:sp>
+        <p:nvSpPr>
+          <p:cNvPr id="11" name="TextBox 10"/>
+          <p:cNvSpPr txBox="1"/>
+          <p:nvPr/>
+        </p:nvSpPr>
+        <p:spPr>
+          <a:xfrm>
+            <a:off x="1600000" y="1400000"/>
+            <a:ext cx="10150000" cy="620000"/>
+          </a:xfrm>
+          <a:prstGeom prst="rect">
+            <a:avLst/>
+          </a:prstGeom>
+          <a:noFill/>
+        </p:spPr>
+        <p:txBody>
+          <a:bodyPr wrap="square" anchor="ctr">
+            <a:spAutoFit/>
+          </a:bodyPr>
+          <a:lstStyle/>
+          <a:p>
+            <a:pPr algn="l"/>
+            <a:r>
+              <a:rPr sz="1300" b="0">
                 <a:solidFill>
                   <a:srgbClr val="333333"/>
                 </a:solidFill>
@@ -7703,17 +9271,161 @@
                 <a:ea typeface="Open Sans"/>
                 <a:cs typeface="Open Sans"/>
               </a:rPr>
-              <a:t>•  Не оставляйте пострадавшего без наблюдения</a:t>
-            </a:r>
-          </a:p>
-          <a:p>
-            <a:pPr algn="l">
-              <a:spcAft>
-                <a:spcPts val="800"/>
-              </a:spcAft>
-            </a:pPr>
-            <a:r>
-              <a:rPr sz="1400" b="0">
+              <a:t>Повторно оцените сознание и дыхание.</a:t>
+            </a:r>
+          </a:p>
+        </p:txBody>
+      </p:sp>
+      <p:sp>
+        <p:nvSpPr>
+          <p:cNvPr id="12" name="Oval 11"/>
+          <p:cNvSpPr/>
+          <p:nvPr/>
+        </p:nvSpPr>
+        <p:spPr>
+          <a:xfrm>
+            <a:off x="700000" y="2100000"/>
+            <a:ext cx="500000" cy="500000"/>
+          </a:xfrm>
+          <a:prstGeom prst="ellipse">
+            <a:avLst/>
+          </a:prstGeom>
+          <a:solidFill>
+            <a:srgbClr val="555555"/>
+          </a:solidFill>
+          <a:ln>
+            <a:noFill/>
+          </a:ln>
+        </p:spPr>
+        <p:style>
+          <a:lnRef idx="1">
+            <a:schemeClr val="accent1"/>
+          </a:lnRef>
+          <a:fillRef idx="3">
+            <a:schemeClr val="accent1"/>
+          </a:fillRef>
+          <a:effectRef idx="2">
+            <a:schemeClr val="accent1"/>
+          </a:effectRef>
+          <a:fontRef idx="minor">
+            <a:schemeClr val="lt1"/>
+          </a:fontRef>
+        </p:style>
+        <p:txBody>
+          <a:bodyPr rtlCol="0" anchor="ctr"/>
+          <a:lstStyle/>
+          <a:p>
+            <a:pPr algn="ctr"/>
+          </a:p>
+        </p:txBody>
+      </p:sp>
+      <p:sp>
+        <p:nvSpPr>
+          <p:cNvPr id="13" name="TextBox 12"/>
+          <p:cNvSpPr txBox="1"/>
+          <p:nvPr/>
+        </p:nvSpPr>
+        <p:spPr>
+          <a:xfrm>
+            <a:off x="700000" y="2100000"/>
+            <a:ext cx="500000" cy="500000"/>
+          </a:xfrm>
+          <a:prstGeom prst="rect">
+            <a:avLst/>
+          </a:prstGeom>
+          <a:noFill/>
+        </p:spPr>
+        <p:txBody>
+          <a:bodyPr wrap="square" anchor="ctr">
+            <a:spAutoFit/>
+          </a:bodyPr>
+          <a:lstStyle/>
+          <a:p>
+            <a:pPr algn="ctr"/>
+            <a:r>
+              <a:rPr sz="1300" b="1">
+                <a:solidFill>
+                  <a:srgbClr val="FFFFFF"/>
+                </a:solidFill>
+                <a:latin typeface="Open Sans"/>
+                <a:ea typeface="Open Sans"/>
+                <a:cs typeface="Open Sans"/>
+              </a:rPr>
+              <a:t>2</a:t>
+            </a:r>
+          </a:p>
+        </p:txBody>
+      </p:sp>
+      <p:sp>
+        <p:nvSpPr>
+          <p:cNvPr id="14" name="Rectangle 13"/>
+          <p:cNvSpPr/>
+          <p:nvPr/>
+        </p:nvSpPr>
+        <p:spPr>
+          <a:xfrm>
+            <a:off x="1400000" y="2100000"/>
+            <a:ext cx="10550000" cy="620000"/>
+          </a:xfrm>
+          <a:prstGeom prst="rect">
+            <a:avLst/>
+          </a:prstGeom>
+          <a:solidFill>
+            <a:srgbClr val="FFFFFF"/>
+          </a:solidFill>
+          <a:ln w="12700">
+            <a:solidFill>
+              <a:srgbClr val="999999"/>
+            </a:solidFill>
+          </a:ln>
+        </p:spPr>
+        <p:style>
+          <a:lnRef idx="1">
+            <a:schemeClr val="accent1"/>
+          </a:lnRef>
+          <a:fillRef idx="3">
+            <a:schemeClr val="accent1"/>
+          </a:fillRef>
+          <a:effectRef idx="2">
+            <a:schemeClr val="accent1"/>
+          </a:effectRef>
+          <a:fontRef idx="minor">
+            <a:schemeClr val="lt1"/>
+          </a:fontRef>
+        </p:style>
+        <p:txBody>
+          <a:bodyPr rtlCol="0" anchor="ctr"/>
+          <a:lstStyle/>
+          <a:p>
+            <a:pPr algn="ctr"/>
+          </a:p>
+        </p:txBody>
+      </p:sp>
+      <p:sp>
+        <p:nvSpPr>
+          <p:cNvPr id="15" name="TextBox 14"/>
+          <p:cNvSpPr txBox="1"/>
+          <p:nvPr/>
+        </p:nvSpPr>
+        <p:spPr>
+          <a:xfrm>
+            <a:off x="1600000" y="2100000"/>
+            <a:ext cx="10150000" cy="620000"/>
+          </a:xfrm>
+          <a:prstGeom prst="rect">
+            <a:avLst/>
+          </a:prstGeom>
+          <a:noFill/>
+        </p:spPr>
+        <p:txBody>
+          <a:bodyPr wrap="square" anchor="ctr">
+            <a:spAutoFit/>
+          </a:bodyPr>
+          <a:lstStyle/>
+          <a:p>
+            <a:pPr algn="l"/>
+            <a:r>
+              <a:rPr sz="1300" b="0">
                 <a:solidFill>
                   <a:srgbClr val="333333"/>
                 </a:solidFill>
@@ -7721,17 +9433,161 @@
                 <a:ea typeface="Open Sans"/>
                 <a:cs typeface="Open Sans"/>
               </a:rPr>
-              <a:t>•  Контролируйте сознание и дыхание</a:t>
-            </a:r>
-          </a:p>
-          <a:p>
-            <a:pPr algn="l">
-              <a:spcAft>
-                <a:spcPts val="800"/>
-              </a:spcAft>
-            </a:pPr>
-            <a:r>
-              <a:rPr sz="1400" b="0">
+              <a:t>Остановите кровотечение, закройте раны и проверьте повязки.</a:t>
+            </a:r>
+          </a:p>
+        </p:txBody>
+      </p:sp>
+      <p:sp>
+        <p:nvSpPr>
+          <p:cNvPr id="16" name="Oval 15"/>
+          <p:cNvSpPr/>
+          <p:nvPr/>
+        </p:nvSpPr>
+        <p:spPr>
+          <a:xfrm>
+            <a:off x="700000" y="2800000"/>
+            <a:ext cx="500000" cy="500000"/>
+          </a:xfrm>
+          <a:prstGeom prst="ellipse">
+            <a:avLst/>
+          </a:prstGeom>
+          <a:solidFill>
+            <a:srgbClr val="555555"/>
+          </a:solidFill>
+          <a:ln>
+            <a:noFill/>
+          </a:ln>
+        </p:spPr>
+        <p:style>
+          <a:lnRef idx="1">
+            <a:schemeClr val="accent1"/>
+          </a:lnRef>
+          <a:fillRef idx="3">
+            <a:schemeClr val="accent1"/>
+          </a:fillRef>
+          <a:effectRef idx="2">
+            <a:schemeClr val="accent1"/>
+          </a:effectRef>
+          <a:fontRef idx="minor">
+            <a:schemeClr val="lt1"/>
+          </a:fontRef>
+        </p:style>
+        <p:txBody>
+          <a:bodyPr rtlCol="0" anchor="ctr"/>
+          <a:lstStyle/>
+          <a:p>
+            <a:pPr algn="ctr"/>
+          </a:p>
+        </p:txBody>
+      </p:sp>
+      <p:sp>
+        <p:nvSpPr>
+          <p:cNvPr id="17" name="TextBox 16"/>
+          <p:cNvSpPr txBox="1"/>
+          <p:nvPr/>
+        </p:nvSpPr>
+        <p:spPr>
+          <a:xfrm>
+            <a:off x="700000" y="2800000"/>
+            <a:ext cx="500000" cy="500000"/>
+          </a:xfrm>
+          <a:prstGeom prst="rect">
+            <a:avLst/>
+          </a:prstGeom>
+          <a:noFill/>
+        </p:spPr>
+        <p:txBody>
+          <a:bodyPr wrap="square" anchor="ctr">
+            <a:spAutoFit/>
+          </a:bodyPr>
+          <a:lstStyle/>
+          <a:p>
+            <a:pPr algn="ctr"/>
+            <a:r>
+              <a:rPr sz="1300" b="1">
+                <a:solidFill>
+                  <a:srgbClr val="FFFFFF"/>
+                </a:solidFill>
+                <a:latin typeface="Open Sans"/>
+                <a:ea typeface="Open Sans"/>
+                <a:cs typeface="Open Sans"/>
+              </a:rPr>
+              <a:t>3</a:t>
+            </a:r>
+          </a:p>
+        </p:txBody>
+      </p:sp>
+      <p:sp>
+        <p:nvSpPr>
+          <p:cNvPr id="18" name="Rectangle 17"/>
+          <p:cNvSpPr/>
+          <p:nvPr/>
+        </p:nvSpPr>
+        <p:spPr>
+          <a:xfrm>
+            <a:off x="1400000" y="2800000"/>
+            <a:ext cx="10550000" cy="620000"/>
+          </a:xfrm>
+          <a:prstGeom prst="rect">
+            <a:avLst/>
+          </a:prstGeom>
+          <a:solidFill>
+            <a:srgbClr val="FFFFFF"/>
+          </a:solidFill>
+          <a:ln w="12700">
+            <a:solidFill>
+              <a:srgbClr val="999999"/>
+            </a:solidFill>
+          </a:ln>
+        </p:spPr>
+        <p:style>
+          <a:lnRef idx="1">
+            <a:schemeClr val="accent1"/>
+          </a:lnRef>
+          <a:fillRef idx="3">
+            <a:schemeClr val="accent1"/>
+          </a:fillRef>
+          <a:effectRef idx="2">
+            <a:schemeClr val="accent1"/>
+          </a:effectRef>
+          <a:fontRef idx="minor">
+            <a:schemeClr val="lt1"/>
+          </a:fontRef>
+        </p:style>
+        <p:txBody>
+          <a:bodyPr rtlCol="0" anchor="ctr"/>
+          <a:lstStyle/>
+          <a:p>
+            <a:pPr algn="ctr"/>
+          </a:p>
+        </p:txBody>
+      </p:sp>
+      <p:sp>
+        <p:nvSpPr>
+          <p:cNvPr id="19" name="TextBox 18"/>
+          <p:cNvSpPr txBox="1"/>
+          <p:nvPr/>
+        </p:nvSpPr>
+        <p:spPr>
+          <a:xfrm>
+            <a:off x="1600000" y="2800000"/>
+            <a:ext cx="10150000" cy="620000"/>
+          </a:xfrm>
+          <a:prstGeom prst="rect">
+            <a:avLst/>
+          </a:prstGeom>
+          <a:noFill/>
+        </p:spPr>
+        <p:txBody>
+          <a:bodyPr wrap="square" anchor="ctr">
+            <a:spAutoFit/>
+          </a:bodyPr>
+          <a:lstStyle/>
+          <a:p>
+            <a:pPr algn="l"/>
+            <a:r>
+              <a:rPr sz="1300" b="0">
                 <a:solidFill>
                   <a:srgbClr val="333333"/>
                 </a:solidFill>
@@ -7739,17 +9595,161 @@
                 <a:ea typeface="Open Sans"/>
                 <a:cs typeface="Open Sans"/>
               </a:rPr>
-              <a:t>•  Следите за повязками и кровотечением</a:t>
-            </a:r>
-          </a:p>
-          <a:p>
-            <a:pPr algn="l">
-              <a:spcAft>
-                <a:spcPts val="800"/>
-              </a:spcAft>
-            </a:pPr>
-            <a:r>
-              <a:rPr sz="1400" b="0">
+              <a:t>Обездвижьте предполагаемые переломы в найденном положении.</a:t>
+            </a:r>
+          </a:p>
+        </p:txBody>
+      </p:sp>
+      <p:sp>
+        <p:nvSpPr>
+          <p:cNvPr id="20" name="Oval 19"/>
+          <p:cNvSpPr/>
+          <p:nvPr/>
+        </p:nvSpPr>
+        <p:spPr>
+          <a:xfrm>
+            <a:off x="700000" y="3500000"/>
+            <a:ext cx="500000" cy="500000"/>
+          </a:xfrm>
+          <a:prstGeom prst="ellipse">
+            <a:avLst/>
+          </a:prstGeom>
+          <a:solidFill>
+            <a:srgbClr val="555555"/>
+          </a:solidFill>
+          <a:ln>
+            <a:noFill/>
+          </a:ln>
+        </p:spPr>
+        <p:style>
+          <a:lnRef idx="1">
+            <a:schemeClr val="accent1"/>
+          </a:lnRef>
+          <a:fillRef idx="3">
+            <a:schemeClr val="accent1"/>
+          </a:fillRef>
+          <a:effectRef idx="2">
+            <a:schemeClr val="accent1"/>
+          </a:effectRef>
+          <a:fontRef idx="minor">
+            <a:schemeClr val="lt1"/>
+          </a:fontRef>
+        </p:style>
+        <p:txBody>
+          <a:bodyPr rtlCol="0" anchor="ctr"/>
+          <a:lstStyle/>
+          <a:p>
+            <a:pPr algn="ctr"/>
+          </a:p>
+        </p:txBody>
+      </p:sp>
+      <p:sp>
+        <p:nvSpPr>
+          <p:cNvPr id="21" name="TextBox 20"/>
+          <p:cNvSpPr txBox="1"/>
+          <p:nvPr/>
+        </p:nvSpPr>
+        <p:spPr>
+          <a:xfrm>
+            <a:off x="700000" y="3500000"/>
+            <a:ext cx="500000" cy="500000"/>
+          </a:xfrm>
+          <a:prstGeom prst="rect">
+            <a:avLst/>
+          </a:prstGeom>
+          <a:noFill/>
+        </p:spPr>
+        <p:txBody>
+          <a:bodyPr wrap="square" anchor="ctr">
+            <a:spAutoFit/>
+          </a:bodyPr>
+          <a:lstStyle/>
+          <a:p>
+            <a:pPr algn="ctr"/>
+            <a:r>
+              <a:rPr sz="1300" b="1">
+                <a:solidFill>
+                  <a:srgbClr val="FFFFFF"/>
+                </a:solidFill>
+                <a:latin typeface="Open Sans"/>
+                <a:ea typeface="Open Sans"/>
+                <a:cs typeface="Open Sans"/>
+              </a:rPr>
+              <a:t>4</a:t>
+            </a:r>
+          </a:p>
+        </p:txBody>
+      </p:sp>
+      <p:sp>
+        <p:nvSpPr>
+          <p:cNvPr id="22" name="Rectangle 21"/>
+          <p:cNvSpPr/>
+          <p:nvPr/>
+        </p:nvSpPr>
+        <p:spPr>
+          <a:xfrm>
+            <a:off x="1400000" y="3500000"/>
+            <a:ext cx="10550000" cy="620000"/>
+          </a:xfrm>
+          <a:prstGeom prst="rect">
+            <a:avLst/>
+          </a:prstGeom>
+          <a:solidFill>
+            <a:srgbClr val="FFFFFF"/>
+          </a:solidFill>
+          <a:ln w="12700">
+            <a:solidFill>
+              <a:srgbClr val="999999"/>
+            </a:solidFill>
+          </a:ln>
+        </p:spPr>
+        <p:style>
+          <a:lnRef idx="1">
+            <a:schemeClr val="accent1"/>
+          </a:lnRef>
+          <a:fillRef idx="3">
+            <a:schemeClr val="accent1"/>
+          </a:fillRef>
+          <a:effectRef idx="2">
+            <a:schemeClr val="accent1"/>
+          </a:effectRef>
+          <a:fontRef idx="minor">
+            <a:schemeClr val="lt1"/>
+          </a:fontRef>
+        </p:style>
+        <p:txBody>
+          <a:bodyPr rtlCol="0" anchor="ctr"/>
+          <a:lstStyle/>
+          <a:p>
+            <a:pPr algn="ctr"/>
+          </a:p>
+        </p:txBody>
+      </p:sp>
+      <p:sp>
+        <p:nvSpPr>
+          <p:cNvPr id="23" name="TextBox 22"/>
+          <p:cNvSpPr txBox="1"/>
+          <p:nvPr/>
+        </p:nvSpPr>
+        <p:spPr>
+          <a:xfrm>
+            <a:off x="1600000" y="3500000"/>
+            <a:ext cx="10150000" cy="620000"/>
+          </a:xfrm>
+          <a:prstGeom prst="rect">
+            <a:avLst/>
+          </a:prstGeom>
+          <a:noFill/>
+        </p:spPr>
+        <p:txBody>
+          <a:bodyPr wrap="square" anchor="ctr">
+            <a:spAutoFit/>
+          </a:bodyPr>
+          <a:lstStyle/>
+          <a:p>
+            <a:pPr algn="l"/>
+            <a:r>
+              <a:rPr sz="1300" b="0">
                 <a:solidFill>
                   <a:srgbClr val="333333"/>
                 </a:solidFill>
@@ -7757,25 +9757,331 @@
                 <a:ea typeface="Open Sans"/>
                 <a:cs typeface="Open Sans"/>
               </a:rPr>
-              <a:t>•  Избегайте резких движений и перегрева или охлаждения</a:t>
-            </a:r>
-          </a:p>
-          <a:p>
-            <a:pPr algn="l">
-              <a:spcAft>
-                <a:spcPts val="800"/>
-              </a:spcAft>
-            </a:pPr>
-            <a:r>
-              <a:rPr sz="1400" b="1">
-                <a:solidFill>
-                  <a:srgbClr val="CC0000"/>
-                </a:solidFill>
-                <a:latin typeface="Open Sans"/>
-                <a:ea typeface="Open Sans"/>
-                <a:cs typeface="Open Sans"/>
-              </a:rPr>
-              <a:t>•  При резком ухудшении остановитесь и вызовите скорую помощь</a:t>
+              <a:t>Выберите положение с учетом дыхания и области травмы.</a:t>
+            </a:r>
+          </a:p>
+        </p:txBody>
+      </p:sp>
+      <p:sp>
+        <p:nvSpPr>
+          <p:cNvPr id="24" name="Oval 23"/>
+          <p:cNvSpPr/>
+          <p:nvPr/>
+        </p:nvSpPr>
+        <p:spPr>
+          <a:xfrm>
+            <a:off x="700000" y="4200000"/>
+            <a:ext cx="500000" cy="500000"/>
+          </a:xfrm>
+          <a:prstGeom prst="ellipse">
+            <a:avLst/>
+          </a:prstGeom>
+          <a:solidFill>
+            <a:srgbClr val="555555"/>
+          </a:solidFill>
+          <a:ln>
+            <a:noFill/>
+          </a:ln>
+        </p:spPr>
+        <p:style>
+          <a:lnRef idx="1">
+            <a:schemeClr val="accent1"/>
+          </a:lnRef>
+          <a:fillRef idx="3">
+            <a:schemeClr val="accent1"/>
+          </a:fillRef>
+          <a:effectRef idx="2">
+            <a:schemeClr val="accent1"/>
+          </a:effectRef>
+          <a:fontRef idx="minor">
+            <a:schemeClr val="lt1"/>
+          </a:fontRef>
+        </p:style>
+        <p:txBody>
+          <a:bodyPr rtlCol="0" anchor="ctr"/>
+          <a:lstStyle/>
+          <a:p>
+            <a:pPr algn="ctr"/>
+          </a:p>
+        </p:txBody>
+      </p:sp>
+      <p:sp>
+        <p:nvSpPr>
+          <p:cNvPr id="25" name="TextBox 24"/>
+          <p:cNvSpPr txBox="1"/>
+          <p:nvPr/>
+        </p:nvSpPr>
+        <p:spPr>
+          <a:xfrm>
+            <a:off x="700000" y="4200000"/>
+            <a:ext cx="500000" cy="500000"/>
+          </a:xfrm>
+          <a:prstGeom prst="rect">
+            <a:avLst/>
+          </a:prstGeom>
+          <a:noFill/>
+        </p:spPr>
+        <p:txBody>
+          <a:bodyPr wrap="square" anchor="ctr">
+            <a:spAutoFit/>
+          </a:bodyPr>
+          <a:lstStyle/>
+          <a:p>
+            <a:pPr algn="ctr"/>
+            <a:r>
+              <a:rPr sz="1300" b="1">
+                <a:solidFill>
+                  <a:srgbClr val="FFFFFF"/>
+                </a:solidFill>
+                <a:latin typeface="Open Sans"/>
+                <a:ea typeface="Open Sans"/>
+                <a:cs typeface="Open Sans"/>
+              </a:rPr>
+              <a:t>5</a:t>
+            </a:r>
+          </a:p>
+        </p:txBody>
+      </p:sp>
+      <p:sp>
+        <p:nvSpPr>
+          <p:cNvPr id="26" name="Rectangle 25"/>
+          <p:cNvSpPr/>
+          <p:nvPr/>
+        </p:nvSpPr>
+        <p:spPr>
+          <a:xfrm>
+            <a:off x="1400000" y="4200000"/>
+            <a:ext cx="10550000" cy="620000"/>
+          </a:xfrm>
+          <a:prstGeom prst="rect">
+            <a:avLst/>
+          </a:prstGeom>
+          <a:solidFill>
+            <a:srgbClr val="FFFFFF"/>
+          </a:solidFill>
+          <a:ln w="12700">
+            <a:solidFill>
+              <a:srgbClr val="999999"/>
+            </a:solidFill>
+          </a:ln>
+        </p:spPr>
+        <p:style>
+          <a:lnRef idx="1">
+            <a:schemeClr val="accent1"/>
+          </a:lnRef>
+          <a:fillRef idx="3">
+            <a:schemeClr val="accent1"/>
+          </a:fillRef>
+          <a:effectRef idx="2">
+            <a:schemeClr val="accent1"/>
+          </a:effectRef>
+          <a:fontRef idx="minor">
+            <a:schemeClr val="lt1"/>
+          </a:fontRef>
+        </p:style>
+        <p:txBody>
+          <a:bodyPr rtlCol="0" anchor="ctr"/>
+          <a:lstStyle/>
+          <a:p>
+            <a:pPr algn="ctr"/>
+          </a:p>
+        </p:txBody>
+      </p:sp>
+      <p:sp>
+        <p:nvSpPr>
+          <p:cNvPr id="27" name="TextBox 26"/>
+          <p:cNvSpPr txBox="1"/>
+          <p:nvPr/>
+        </p:nvSpPr>
+        <p:spPr>
+          <a:xfrm>
+            <a:off x="1600000" y="4200000"/>
+            <a:ext cx="10150000" cy="620000"/>
+          </a:xfrm>
+          <a:prstGeom prst="rect">
+            <a:avLst/>
+          </a:prstGeom>
+          <a:noFill/>
+        </p:spPr>
+        <p:txBody>
+          <a:bodyPr wrap="square" anchor="ctr">
+            <a:spAutoFit/>
+          </a:bodyPr>
+          <a:lstStyle/>
+          <a:p>
+            <a:pPr algn="l"/>
+            <a:r>
+              <a:rPr sz="1300" b="0">
+                <a:solidFill>
+                  <a:srgbClr val="333333"/>
+                </a:solidFill>
+                <a:latin typeface="Open Sans"/>
+                <a:ea typeface="Open Sans"/>
+                <a:cs typeface="Open Sans"/>
+              </a:rPr>
+              <a:t>Укройте пострадавшего и защитите от перегревания.</a:t>
+            </a:r>
+          </a:p>
+        </p:txBody>
+      </p:sp>
+      <p:sp>
+        <p:nvSpPr>
+          <p:cNvPr id="28" name="Oval 27"/>
+          <p:cNvSpPr/>
+          <p:nvPr/>
+        </p:nvSpPr>
+        <p:spPr>
+          <a:xfrm>
+            <a:off x="700000" y="4900000"/>
+            <a:ext cx="500000" cy="500000"/>
+          </a:xfrm>
+          <a:prstGeom prst="ellipse">
+            <a:avLst/>
+          </a:prstGeom>
+          <a:solidFill>
+            <a:srgbClr val="555555"/>
+          </a:solidFill>
+          <a:ln>
+            <a:noFill/>
+          </a:ln>
+        </p:spPr>
+        <p:style>
+          <a:lnRef idx="1">
+            <a:schemeClr val="accent1"/>
+          </a:lnRef>
+          <a:fillRef idx="3">
+            <a:schemeClr val="accent1"/>
+          </a:fillRef>
+          <a:effectRef idx="2">
+            <a:schemeClr val="accent1"/>
+          </a:effectRef>
+          <a:fontRef idx="minor">
+            <a:schemeClr val="lt1"/>
+          </a:fontRef>
+        </p:style>
+        <p:txBody>
+          <a:bodyPr rtlCol="0" anchor="ctr"/>
+          <a:lstStyle/>
+          <a:p>
+            <a:pPr algn="ctr"/>
+          </a:p>
+        </p:txBody>
+      </p:sp>
+      <p:sp>
+        <p:nvSpPr>
+          <p:cNvPr id="29" name="TextBox 28"/>
+          <p:cNvSpPr txBox="1"/>
+          <p:nvPr/>
+        </p:nvSpPr>
+        <p:spPr>
+          <a:xfrm>
+            <a:off x="700000" y="4900000"/>
+            <a:ext cx="500000" cy="500000"/>
+          </a:xfrm>
+          <a:prstGeom prst="rect">
+            <a:avLst/>
+          </a:prstGeom>
+          <a:noFill/>
+        </p:spPr>
+        <p:txBody>
+          <a:bodyPr wrap="square" anchor="ctr">
+            <a:spAutoFit/>
+          </a:bodyPr>
+          <a:lstStyle/>
+          <a:p>
+            <a:pPr algn="ctr"/>
+            <a:r>
+              <a:rPr sz="1300" b="1">
+                <a:solidFill>
+                  <a:srgbClr val="FFFFFF"/>
+                </a:solidFill>
+                <a:latin typeface="Open Sans"/>
+                <a:ea typeface="Open Sans"/>
+                <a:cs typeface="Open Sans"/>
+              </a:rPr>
+              <a:t>6</a:t>
+            </a:r>
+          </a:p>
+        </p:txBody>
+      </p:sp>
+      <p:sp>
+        <p:nvSpPr>
+          <p:cNvPr id="30" name="Rectangle 29"/>
+          <p:cNvSpPr/>
+          <p:nvPr/>
+        </p:nvSpPr>
+        <p:spPr>
+          <a:xfrm>
+            <a:off x="1400000" y="4900000"/>
+            <a:ext cx="10550000" cy="620000"/>
+          </a:xfrm>
+          <a:prstGeom prst="rect">
+            <a:avLst/>
+          </a:prstGeom>
+          <a:solidFill>
+            <a:srgbClr val="FFFFFF"/>
+          </a:solidFill>
+          <a:ln w="12700">
+            <a:solidFill>
+              <a:srgbClr val="999999"/>
+            </a:solidFill>
+          </a:ln>
+        </p:spPr>
+        <p:style>
+          <a:lnRef idx="1">
+            <a:schemeClr val="accent1"/>
+          </a:lnRef>
+          <a:fillRef idx="3">
+            <a:schemeClr val="accent1"/>
+          </a:fillRef>
+          <a:effectRef idx="2">
+            <a:schemeClr val="accent1"/>
+          </a:effectRef>
+          <a:fontRef idx="minor">
+            <a:schemeClr val="lt1"/>
+          </a:fontRef>
+        </p:style>
+        <p:txBody>
+          <a:bodyPr rtlCol="0" anchor="ctr"/>
+          <a:lstStyle/>
+          <a:p>
+            <a:pPr algn="ctr"/>
+          </a:p>
+        </p:txBody>
+      </p:sp>
+      <p:sp>
+        <p:nvSpPr>
+          <p:cNvPr id="31" name="TextBox 30"/>
+          <p:cNvSpPr txBox="1"/>
+          <p:nvPr/>
+        </p:nvSpPr>
+        <p:spPr>
+          <a:xfrm>
+            <a:off x="1600000" y="4900000"/>
+            <a:ext cx="10150000" cy="620000"/>
+          </a:xfrm>
+          <a:prstGeom prst="rect">
+            <a:avLst/>
+          </a:prstGeom>
+          <a:noFill/>
+        </p:spPr>
+        <p:txBody>
+          <a:bodyPr wrap="square" anchor="ctr">
+            <a:spAutoFit/>
+          </a:bodyPr>
+          <a:lstStyle/>
+          <a:p>
+            <a:pPr algn="l"/>
+            <a:r>
+              <a:rPr sz="1300" b="0">
+                <a:solidFill>
+                  <a:srgbClr val="333333"/>
+                </a:solidFill>
+                <a:latin typeface="Open Sans"/>
+                <a:ea typeface="Open Sans"/>
+                <a:cs typeface="Open Sans"/>
+              </a:rPr>
+              <a:t>Подготовьте документы, упаковки веществ и сведения об оказанной помощи.</a:t>
             </a:r>
           </a:p>
         </p:txBody>
@@ -7873,7 +10179,7 @@
                 <a:ea typeface="Open Sans"/>
                 <a:cs typeface="Open Sans"/>
               </a:rPr>
-              <a:t>ГЛАВНОЕ ЗАПОМНИТЬ</a:t>
+              <a:t>ПОЛОЖЕНИЕ И КОМФОРТ</a:t>
             </a:r>
           </a:p>
         </p:txBody>
@@ -8040,89 +10346,75 @@
       </p:sp>
       <p:sp>
         <p:nvSpPr>
-          <p:cNvPr id="8" name="Rectangle 7"/>
-          <p:cNvSpPr/>
-          <p:nvPr/>
-        </p:nvSpPr>
-        <p:spPr>
-          <a:xfrm>
-            <a:off x="700000" y="1450000"/>
-            <a:ext cx="11000000" cy="850000"/>
-          </a:xfrm>
-          <a:prstGeom prst="rect">
-            <a:avLst/>
-          </a:prstGeom>
-          <a:solidFill>
-            <a:srgbClr val="FFFFFF"/>
-          </a:solidFill>
-          <a:ln w="12700">
-            <a:solidFill>
-              <a:srgbClr val="999999"/>
-            </a:solidFill>
-          </a:ln>
-        </p:spPr>
-        <p:style>
-          <a:lnRef idx="1">
-            <a:schemeClr val="accent1"/>
-          </a:lnRef>
-          <a:fillRef idx="3">
-            <a:schemeClr val="accent1"/>
-          </a:fillRef>
-          <a:effectRef idx="2">
-            <a:schemeClr val="accent1"/>
-          </a:effectRef>
-          <a:fontRef idx="minor">
-            <a:schemeClr val="lt1"/>
-          </a:fontRef>
-        </p:style>
-        <p:txBody>
-          <a:bodyPr rtlCol="0" anchor="ctr"/>
-          <a:lstStyle/>
-          <a:p>
-            <a:pPr algn="ctr"/>
-          </a:p>
-        </p:txBody>
-      </p:sp>
-      <p:sp>
-        <p:nvSpPr>
-          <p:cNvPr id="9" name="Rectangle 8"/>
-          <p:cNvSpPr/>
-          <p:nvPr/>
-        </p:nvSpPr>
-        <p:spPr>
-          <a:xfrm>
-            <a:off x="700000" y="1450000"/>
-            <a:ext cx="90000" cy="850000"/>
-          </a:xfrm>
-          <a:prstGeom prst="rect">
-            <a:avLst/>
-          </a:prstGeom>
-          <a:solidFill>
-            <a:srgbClr val="CC0000"/>
-          </a:solidFill>
-          <a:ln>
-            <a:noFill/>
-          </a:ln>
-        </p:spPr>
-        <p:style>
-          <a:lnRef idx="1">
-            <a:schemeClr val="accent1"/>
-          </a:lnRef>
-          <a:fillRef idx="3">
-            <a:schemeClr val="accent1"/>
-          </a:fillRef>
-          <a:effectRef idx="2">
-            <a:schemeClr val="accent1"/>
-          </a:effectRef>
-          <a:fontRef idx="minor">
-            <a:schemeClr val="lt1"/>
-          </a:fontRef>
-        </p:style>
-        <p:txBody>
-          <a:bodyPr rtlCol="0" anchor="ctr"/>
-          <a:lstStyle/>
-          <a:p>
-            <a:pPr algn="ctr"/>
+          <p:cNvPr id="8" name="TextBox 7"/>
+          <p:cNvSpPr txBox="1"/>
+          <p:nvPr/>
+        </p:nvSpPr>
+        <p:spPr>
+          <a:xfrm>
+            <a:off x="700000" y="1400000"/>
+            <a:ext cx="5400000" cy="400000"/>
+          </a:xfrm>
+          <a:prstGeom prst="rect">
+            <a:avLst/>
+          </a:prstGeom>
+          <a:noFill/>
+        </p:spPr>
+        <p:txBody>
+          <a:bodyPr wrap="square" anchor="t">
+            <a:spAutoFit/>
+          </a:bodyPr>
+          <a:lstStyle/>
+          <a:p>
+            <a:pPr algn="l"/>
+            <a:r>
+              <a:rPr sz="1400" b="1">
+                <a:solidFill>
+                  <a:srgbClr val="333333"/>
+                </a:solidFill>
+                <a:latin typeface="Open Sans"/>
+                <a:ea typeface="Open Sans"/>
+                <a:cs typeface="Open Sans"/>
+              </a:rPr>
+              <a:t>Безопасное размещение</a:t>
+            </a:r>
+          </a:p>
+        </p:txBody>
+      </p:sp>
+      <p:sp>
+        <p:nvSpPr>
+          <p:cNvPr id="9" name="TextBox 8"/>
+          <p:cNvSpPr txBox="1"/>
+          <p:nvPr/>
+        </p:nvSpPr>
+        <p:spPr>
+          <a:xfrm>
+            <a:off x="6600000" y="1400000"/>
+            <a:ext cx="5400000" cy="400000"/>
+          </a:xfrm>
+          <a:prstGeom prst="rect">
+            <a:avLst/>
+          </a:prstGeom>
+          <a:noFill/>
+        </p:spPr>
+        <p:txBody>
+          <a:bodyPr wrap="square" anchor="t">
+            <a:spAutoFit/>
+          </a:bodyPr>
+          <a:lstStyle/>
+          <a:p>
+            <a:pPr algn="l"/>
+            <a:r>
+              <a:rPr sz="1400" b="1">
+                <a:solidFill>
+                  <a:srgbClr val="333333"/>
+                </a:solidFill>
+                <a:latin typeface="Open Sans"/>
+                <a:ea typeface="Open Sans"/>
+                <a:cs typeface="Open Sans"/>
+              </a:rPr>
+              <a:t>Комфорт</a:t>
+            </a:r>
           </a:p>
         </p:txBody>
       </p:sp>
@@ -8134,8 +10426,8 @@
         </p:nvSpPr>
         <p:spPr>
           <a:xfrm>
-            <a:off x="1000000" y="1550000"/>
-            <a:ext cx="10400000" cy="650000"/>
+            <a:off x="700000" y="1850000"/>
+            <a:ext cx="5400000" cy="4000000"/>
           </a:xfrm>
           <a:prstGeom prst="rect">
             <a:avLst/>
@@ -8143,12 +10435,16 @@
           <a:noFill/>
         </p:spPr>
         <p:txBody>
-          <a:bodyPr wrap="square" anchor="ctr">
+          <a:bodyPr wrap="square">
             <a:spAutoFit/>
           </a:bodyPr>
           <a:lstStyle/>
           <a:p>
-            <a:pPr algn="l"/>
+            <a:pPr algn="l">
+              <a:spcAft>
+                <a:spcPts val="800"/>
+              </a:spcAft>
+            </a:pPr>
             <a:r>
               <a:rPr sz="1300" b="0">
                 <a:solidFill>
@@ -8158,109 +10454,75 @@
                 <a:ea typeface="Open Sans"/>
                 <a:cs typeface="Open Sans"/>
               </a:rPr>
-              <a:t>Предпочтительно дождаться скорой</a:t>
-            </a:r>
-          </a:p>
-        </p:txBody>
-      </p:sp>
-      <p:sp>
-        <p:nvSpPr>
-          <p:cNvPr id="11" name="Rectangle 10"/>
-          <p:cNvSpPr/>
-          <p:nvPr/>
-        </p:nvSpPr>
-        <p:spPr>
-          <a:xfrm>
-            <a:off x="700000" y="2400000"/>
-            <a:ext cx="11000000" cy="850000"/>
-          </a:xfrm>
-          <a:prstGeom prst="rect">
-            <a:avLst/>
-          </a:prstGeom>
-          <a:solidFill>
-            <a:srgbClr val="FFFFFF"/>
-          </a:solidFill>
-          <a:ln w="12700">
-            <a:solidFill>
-              <a:srgbClr val="999999"/>
-            </a:solidFill>
-          </a:ln>
-        </p:spPr>
-        <p:style>
-          <a:lnRef idx="1">
-            <a:schemeClr val="accent1"/>
-          </a:lnRef>
-          <a:fillRef idx="3">
-            <a:schemeClr val="accent1"/>
-          </a:fillRef>
-          <a:effectRef idx="2">
-            <a:schemeClr val="accent1"/>
-          </a:effectRef>
-          <a:fontRef idx="minor">
-            <a:schemeClr val="lt1"/>
-          </a:fontRef>
-        </p:style>
-        <p:txBody>
-          <a:bodyPr rtlCol="0" anchor="ctr"/>
-          <a:lstStyle/>
-          <a:p>
-            <a:pPr algn="ctr"/>
-          </a:p>
-        </p:txBody>
-      </p:sp>
-      <p:sp>
-        <p:nvSpPr>
-          <p:cNvPr id="12" name="Rectangle 11"/>
-          <p:cNvSpPr/>
-          <p:nvPr/>
-        </p:nvSpPr>
-        <p:spPr>
-          <a:xfrm>
-            <a:off x="700000" y="2400000"/>
-            <a:ext cx="90000" cy="850000"/>
-          </a:xfrm>
-          <a:prstGeom prst="rect">
-            <a:avLst/>
-          </a:prstGeom>
-          <a:solidFill>
-            <a:srgbClr val="CC0000"/>
-          </a:solidFill>
-          <a:ln>
-            <a:noFill/>
-          </a:ln>
-        </p:spPr>
-        <p:style>
-          <a:lnRef idx="1">
-            <a:schemeClr val="accent1"/>
-          </a:lnRef>
-          <a:fillRef idx="3">
-            <a:schemeClr val="accent1"/>
-          </a:fillRef>
-          <a:effectRef idx="2">
-            <a:schemeClr val="accent1"/>
-          </a:effectRef>
-          <a:fontRef idx="minor">
-            <a:schemeClr val="lt1"/>
-          </a:fontRef>
-        </p:style>
-        <p:txBody>
-          <a:bodyPr rtlCol="0" anchor="ctr"/>
-          <a:lstStyle/>
-          <a:p>
-            <a:pPr algn="ctr"/>
-          </a:p>
-        </p:txBody>
-      </p:sp>
-      <p:sp>
-        <p:nvSpPr>
-          <p:cNvPr id="13" name="TextBox 12"/>
+              <a:t>•  надежно закрепите носилки или место в автомобиле</a:t>
+            </a:r>
+          </a:p>
+          <a:p>
+            <a:pPr algn="l">
+              <a:spcAft>
+                <a:spcPts val="800"/>
+              </a:spcAft>
+            </a:pPr>
+            <a:r>
+              <a:rPr sz="1300" b="0">
+                <a:solidFill>
+                  <a:srgbClr val="333333"/>
+                </a:solidFill>
+                <a:latin typeface="Open Sans"/>
+                <a:ea typeface="Open Sans"/>
+                <a:cs typeface="Open Sans"/>
+              </a:rPr>
+              <a:t>•  не допускайте скручивания туловища и ударов поврежденной частью</a:t>
+            </a:r>
+          </a:p>
+          <a:p>
+            <a:pPr algn="l">
+              <a:spcAft>
+                <a:spcPts val="800"/>
+              </a:spcAft>
+            </a:pPr>
+            <a:r>
+              <a:rPr sz="1300" b="0">
+                <a:solidFill>
+                  <a:srgbClr val="333333"/>
+                </a:solidFill>
+                <a:latin typeface="Open Sans"/>
+                <a:ea typeface="Open Sans"/>
+                <a:cs typeface="Open Sans"/>
+              </a:rPr>
+              <a:t>•  подложите мягкий материал в пустоты и под выступающие участки</a:t>
+            </a:r>
+          </a:p>
+          <a:p>
+            <a:pPr algn="l">
+              <a:spcAft>
+                <a:spcPts val="800"/>
+              </a:spcAft>
+            </a:pPr>
+            <a:r>
+              <a:rPr sz="1300" b="0">
+                <a:solidFill>
+                  <a:srgbClr val="333333"/>
+                </a:solidFill>
+                <a:latin typeface="Open Sans"/>
+                <a:ea typeface="Open Sans"/>
+                <a:cs typeface="Open Sans"/>
+              </a:rPr>
+              <a:t>•  сохраните доступ к лицу, груди и повязкам</a:t>
+            </a:r>
+          </a:p>
+        </p:txBody>
+      </p:sp>
+      <p:sp>
+        <p:nvSpPr>
+          <p:cNvPr id="11" name="TextBox 10"/>
           <p:cNvSpPr txBox="1"/>
           <p:nvPr/>
         </p:nvSpPr>
         <p:spPr>
           <a:xfrm>
-            <a:off x="1000000" y="2500000"/>
-            <a:ext cx="10400000" cy="650000"/>
+            <a:off x="6600000" y="1850000"/>
+            <a:ext cx="5400000" cy="4000000"/>
           </a:xfrm>
           <a:prstGeom prst="rect">
             <a:avLst/>
@@ -8268,12 +10530,16 @@
           <a:noFill/>
         </p:spPr>
         <p:txBody>
-          <a:bodyPr wrap="square" anchor="ctr">
+          <a:bodyPr wrap="square">
             <a:spAutoFit/>
           </a:bodyPr>
           <a:lstStyle/>
           <a:p>
-            <a:pPr algn="l"/>
+            <a:pPr algn="l">
+              <a:spcAft>
+                <a:spcPts val="800"/>
+              </a:spcAft>
+            </a:pPr>
             <a:r>
               <a:rPr sz="1300" b="0">
                 <a:solidFill>
@@ -8283,122 +10549,15 @@
                 <a:ea typeface="Open Sans"/>
                 <a:cs typeface="Open Sans"/>
               </a:rPr>
-              <a:t>Тяжелые травмы без нужды не перемещают</a:t>
-            </a:r>
-          </a:p>
-        </p:txBody>
-      </p:sp>
-      <p:sp>
-        <p:nvSpPr>
-          <p:cNvPr id="14" name="Rectangle 13"/>
-          <p:cNvSpPr/>
-          <p:nvPr/>
-        </p:nvSpPr>
-        <p:spPr>
-          <a:xfrm>
-            <a:off x="700000" y="3350000"/>
-            <a:ext cx="11000000" cy="850000"/>
-          </a:xfrm>
-          <a:prstGeom prst="rect">
-            <a:avLst/>
-          </a:prstGeom>
-          <a:solidFill>
-            <a:srgbClr val="FFFFFF"/>
-          </a:solidFill>
-          <a:ln w="12700">
-            <a:solidFill>
-              <a:srgbClr val="999999"/>
-            </a:solidFill>
-          </a:ln>
-        </p:spPr>
-        <p:style>
-          <a:lnRef idx="1">
-            <a:schemeClr val="accent1"/>
-          </a:lnRef>
-          <a:fillRef idx="3">
-            <a:schemeClr val="accent1"/>
-          </a:fillRef>
-          <a:effectRef idx="2">
-            <a:schemeClr val="accent1"/>
-          </a:effectRef>
-          <a:fontRef idx="minor">
-            <a:schemeClr val="lt1"/>
-          </a:fontRef>
-        </p:style>
-        <p:txBody>
-          <a:bodyPr rtlCol="0" anchor="ctr"/>
-          <a:lstStyle/>
-          <a:p>
-            <a:pPr algn="ctr"/>
-          </a:p>
-        </p:txBody>
-      </p:sp>
-      <p:sp>
-        <p:nvSpPr>
-          <p:cNvPr id="15" name="Rectangle 14"/>
-          <p:cNvSpPr/>
-          <p:nvPr/>
-        </p:nvSpPr>
-        <p:spPr>
-          <a:xfrm>
-            <a:off x="700000" y="3350000"/>
-            <a:ext cx="90000" cy="850000"/>
-          </a:xfrm>
-          <a:prstGeom prst="rect">
-            <a:avLst/>
-          </a:prstGeom>
-          <a:solidFill>
-            <a:srgbClr val="CC0000"/>
-          </a:solidFill>
-          <a:ln>
-            <a:noFill/>
-          </a:ln>
-        </p:spPr>
-        <p:style>
-          <a:lnRef idx="1">
-            <a:schemeClr val="accent1"/>
-          </a:lnRef>
-          <a:fillRef idx="3">
-            <a:schemeClr val="accent1"/>
-          </a:fillRef>
-          <a:effectRef idx="2">
-            <a:schemeClr val="accent1"/>
-          </a:effectRef>
-          <a:fontRef idx="minor">
-            <a:schemeClr val="lt1"/>
-          </a:fontRef>
-        </p:style>
-        <p:txBody>
-          <a:bodyPr rtlCol="0" anchor="ctr"/>
-          <a:lstStyle/>
-          <a:p>
-            <a:pPr algn="ctr"/>
-          </a:p>
-        </p:txBody>
-      </p:sp>
-      <p:sp>
-        <p:nvSpPr>
-          <p:cNvPr id="16" name="TextBox 15"/>
-          <p:cNvSpPr txBox="1"/>
-          <p:nvPr/>
-        </p:nvSpPr>
-        <p:spPr>
-          <a:xfrm>
-            <a:off x="1000000" y="3450000"/>
-            <a:ext cx="10400000" cy="650000"/>
-          </a:xfrm>
-          <a:prstGeom prst="rect">
-            <a:avLst/>
-          </a:prstGeom>
-          <a:noFill/>
-        </p:spPr>
-        <p:txBody>
-          <a:bodyPr wrap="square" anchor="ctr">
-            <a:spAutoFit/>
-          </a:bodyPr>
-          <a:lstStyle/>
-          <a:p>
-            <a:pPr algn="l"/>
+              <a:t>•  поддерживайте подходящую температуру</a:t>
+            </a:r>
+          </a:p>
+          <a:p>
+            <a:pPr algn="l">
+              <a:spcAft>
+                <a:spcPts val="800"/>
+              </a:spcAft>
+            </a:pPr>
             <a:r>
               <a:rPr sz="1300" b="0">
                 <a:solidFill>
@@ -8408,122 +10567,15 @@
                 <a:ea typeface="Open Sans"/>
                 <a:cs typeface="Open Sans"/>
               </a:rPr>
-              <a:t>Перед дорогой зафиксируйте переломы</a:t>
-            </a:r>
-          </a:p>
-        </p:txBody>
-      </p:sp>
-      <p:sp>
-        <p:nvSpPr>
-          <p:cNvPr id="17" name="Rectangle 16"/>
-          <p:cNvSpPr/>
-          <p:nvPr/>
-        </p:nvSpPr>
-        <p:spPr>
-          <a:xfrm>
-            <a:off x="700000" y="4300000"/>
-            <a:ext cx="11000000" cy="850000"/>
-          </a:xfrm>
-          <a:prstGeom prst="rect">
-            <a:avLst/>
-          </a:prstGeom>
-          <a:solidFill>
-            <a:srgbClr val="FFFFFF"/>
-          </a:solidFill>
-          <a:ln w="12700">
-            <a:solidFill>
-              <a:srgbClr val="999999"/>
-            </a:solidFill>
-          </a:ln>
-        </p:spPr>
-        <p:style>
-          <a:lnRef idx="1">
-            <a:schemeClr val="accent1"/>
-          </a:lnRef>
-          <a:fillRef idx="3">
-            <a:schemeClr val="accent1"/>
-          </a:fillRef>
-          <a:effectRef idx="2">
-            <a:schemeClr val="accent1"/>
-          </a:effectRef>
-          <a:fontRef idx="minor">
-            <a:schemeClr val="lt1"/>
-          </a:fontRef>
-        </p:style>
-        <p:txBody>
-          <a:bodyPr rtlCol="0" anchor="ctr"/>
-          <a:lstStyle/>
-          <a:p>
-            <a:pPr algn="ctr"/>
-          </a:p>
-        </p:txBody>
-      </p:sp>
-      <p:sp>
-        <p:nvSpPr>
-          <p:cNvPr id="18" name="Rectangle 17"/>
-          <p:cNvSpPr/>
-          <p:nvPr/>
-        </p:nvSpPr>
-        <p:spPr>
-          <a:xfrm>
-            <a:off x="700000" y="4300000"/>
-            <a:ext cx="90000" cy="850000"/>
-          </a:xfrm>
-          <a:prstGeom prst="rect">
-            <a:avLst/>
-          </a:prstGeom>
-          <a:solidFill>
-            <a:srgbClr val="CC0000"/>
-          </a:solidFill>
-          <a:ln>
-            <a:noFill/>
-          </a:ln>
-        </p:spPr>
-        <p:style>
-          <a:lnRef idx="1">
-            <a:schemeClr val="accent1"/>
-          </a:lnRef>
-          <a:fillRef idx="3">
-            <a:schemeClr val="accent1"/>
-          </a:fillRef>
-          <a:effectRef idx="2">
-            <a:schemeClr val="accent1"/>
-          </a:effectRef>
-          <a:fontRef idx="minor">
-            <a:schemeClr val="lt1"/>
-          </a:fontRef>
-        </p:style>
-        <p:txBody>
-          <a:bodyPr rtlCol="0" anchor="ctr"/>
-          <a:lstStyle/>
-          <a:p>
-            <a:pPr algn="ctr"/>
-          </a:p>
-        </p:txBody>
-      </p:sp>
-      <p:sp>
-        <p:nvSpPr>
-          <p:cNvPr id="19" name="TextBox 18"/>
-          <p:cNvSpPr txBox="1"/>
-          <p:nvPr/>
-        </p:nvSpPr>
-        <p:spPr>
-          <a:xfrm>
-            <a:off x="1000000" y="4400000"/>
-            <a:ext cx="10400000" cy="650000"/>
-          </a:xfrm>
-          <a:prstGeom prst="rect">
-            <a:avLst/>
-          </a:prstGeom>
-          <a:noFill/>
-        </p:spPr>
-        <p:txBody>
-          <a:bodyPr wrap="square" anchor="ctr">
-            <a:spAutoFit/>
-          </a:bodyPr>
-          <a:lstStyle/>
-          <a:p>
-            <a:pPr algn="l"/>
+              <a:t>•  уменьшите шум, резкие ускорения и тряску</a:t>
+            </a:r>
+          </a:p>
+          <a:p>
+            <a:pPr algn="l">
+              <a:spcAft>
+                <a:spcPts val="800"/>
+              </a:spcAft>
+            </a:pPr>
             <a:r>
               <a:rPr sz="1300" b="0">
                 <a:solidFill>
@@ -8533,122 +10585,15 @@
                 <a:ea typeface="Open Sans"/>
                 <a:cs typeface="Open Sans"/>
               </a:rPr>
-              <a:t>Выберите ближайшую медорганизацию</a:t>
-            </a:r>
-          </a:p>
-        </p:txBody>
-      </p:sp>
-      <p:sp>
-        <p:nvSpPr>
-          <p:cNvPr id="20" name="Rectangle 19"/>
-          <p:cNvSpPr/>
-          <p:nvPr/>
-        </p:nvSpPr>
-        <p:spPr>
-          <a:xfrm>
-            <a:off x="700000" y="5250000"/>
-            <a:ext cx="11000000" cy="850000"/>
-          </a:xfrm>
-          <a:prstGeom prst="rect">
-            <a:avLst/>
-          </a:prstGeom>
-          <a:solidFill>
-            <a:srgbClr val="FFFFFF"/>
-          </a:solidFill>
-          <a:ln w="12700">
-            <a:solidFill>
-              <a:srgbClr val="999999"/>
-            </a:solidFill>
-          </a:ln>
-        </p:spPr>
-        <p:style>
-          <a:lnRef idx="1">
-            <a:schemeClr val="accent1"/>
-          </a:lnRef>
-          <a:fillRef idx="3">
-            <a:schemeClr val="accent1"/>
-          </a:fillRef>
-          <a:effectRef idx="2">
-            <a:schemeClr val="accent1"/>
-          </a:effectRef>
-          <a:fontRef idx="minor">
-            <a:schemeClr val="lt1"/>
-          </a:fontRef>
-        </p:style>
-        <p:txBody>
-          <a:bodyPr rtlCol="0" anchor="ctr"/>
-          <a:lstStyle/>
-          <a:p>
-            <a:pPr algn="ctr"/>
-          </a:p>
-        </p:txBody>
-      </p:sp>
-      <p:sp>
-        <p:nvSpPr>
-          <p:cNvPr id="21" name="Rectangle 20"/>
-          <p:cNvSpPr/>
-          <p:nvPr/>
-        </p:nvSpPr>
-        <p:spPr>
-          <a:xfrm>
-            <a:off x="700000" y="5250000"/>
-            <a:ext cx="90000" cy="850000"/>
-          </a:xfrm>
-          <a:prstGeom prst="rect">
-            <a:avLst/>
-          </a:prstGeom>
-          <a:solidFill>
-            <a:srgbClr val="CC0000"/>
-          </a:solidFill>
-          <a:ln>
-            <a:noFill/>
-          </a:ln>
-        </p:spPr>
-        <p:style>
-          <a:lnRef idx="1">
-            <a:schemeClr val="accent1"/>
-          </a:lnRef>
-          <a:fillRef idx="3">
-            <a:schemeClr val="accent1"/>
-          </a:fillRef>
-          <a:effectRef idx="2">
-            <a:schemeClr val="accent1"/>
-          </a:effectRef>
-          <a:fontRef idx="minor">
-            <a:schemeClr val="lt1"/>
-          </a:fontRef>
-        </p:style>
-        <p:txBody>
-          <a:bodyPr rtlCol="0" anchor="ctr"/>
-          <a:lstStyle/>
-          <a:p>
-            <a:pPr algn="ctr"/>
-          </a:p>
-        </p:txBody>
-      </p:sp>
-      <p:sp>
-        <p:nvSpPr>
-          <p:cNvPr id="22" name="TextBox 21"/>
-          <p:cNvSpPr txBox="1"/>
-          <p:nvPr/>
-        </p:nvSpPr>
-        <p:spPr>
-          <a:xfrm>
-            <a:off x="1000000" y="5350000"/>
-            <a:ext cx="10400000" cy="650000"/>
-          </a:xfrm>
-          <a:prstGeom prst="rect">
-            <a:avLst/>
-          </a:prstGeom>
-          <a:noFill/>
-        </p:spPr>
-        <p:txBody>
-          <a:bodyPr wrap="square" anchor="ctr">
-            <a:spAutoFit/>
-          </a:bodyPr>
-          <a:lstStyle/>
-          <a:p>
-            <a:pPr algn="l"/>
+              <a:t>•  объясняйте этапы поездки и поддерживайте контакт</a:t>
+            </a:r>
+          </a:p>
+          <a:p>
+            <a:pPr algn="l">
+              <a:spcAft>
+                <a:spcPts val="800"/>
+              </a:spcAft>
+            </a:pPr>
             <a:r>
               <a:rPr sz="1300" b="0">
                 <a:solidFill>
@@ -8658,7 +10603,7 @@
                 <a:ea typeface="Open Sans"/>
                 <a:cs typeface="Open Sans"/>
               </a:rPr>
-              <a:t>В пути контролируйте дыхание</a:t>
+              <a:t>•  не давайте пищу, питье или лекарства без показаний</a:t>
             </a:r>
           </a:p>
         </p:txBody>
@@ -8756,7 +10701,7 @@
                 <a:ea typeface="Open Sans"/>
                 <a:cs typeface="Open Sans"/>
               </a:rPr>
-              <a:t>ПАМЯТКА</a:t>
+              <a:t>ПЕРЕЛОМЫ И ПОВЯЗКИ В ПУТИ</a:t>
             </a:r>
           </a:p>
         </p:txBody>
@@ -8921,30 +10866,137 @@
           </a:p>
         </p:txBody>
       </p:sp>
-      <p:pic>
-        <p:nvPicPr>
-          <p:cNvPr id="8" name="Picture 7" descr="pamyatka-tema4-transportirovka-16x9.png"/>
-          <p:cNvPicPr>
-            <a:picLocks noChangeAspect="1"/>
-          </p:cNvPicPr>
-          <p:nvPr/>
-        </p:nvPicPr>
-        <p:blipFill>
-          <a:blip r:embed="rId2"/>
-          <a:stretch>
-            <a:fillRect/>
-          </a:stretch>
-        </p:blipFill>
-        <p:spPr>
-          <a:xfrm>
-            <a:off x="2300000" y="1400000"/>
-            <a:ext cx="7800000" cy="5200000"/>
-          </a:xfrm>
-          <a:prstGeom prst="rect">
-            <a:avLst/>
-          </a:prstGeom>
-        </p:spPr>
-      </p:pic>
+      <p:sp>
+        <p:nvSpPr>
+          <p:cNvPr id="8" name="TextBox 7"/>
+          <p:cNvSpPr txBox="1"/>
+          <p:nvPr/>
+        </p:nvSpPr>
+        <p:spPr>
+          <a:xfrm>
+            <a:off x="700000" y="1450000"/>
+            <a:ext cx="11000000" cy="4000000"/>
+          </a:xfrm>
+          <a:prstGeom prst="rect">
+            <a:avLst/>
+          </a:prstGeom>
+          <a:noFill/>
+        </p:spPr>
+        <p:txBody>
+          <a:bodyPr wrap="square">
+            <a:spAutoFit/>
+          </a:bodyPr>
+          <a:lstStyle/>
+          <a:p>
+            <a:pPr algn="l">
+              <a:spcAft>
+                <a:spcPts val="800"/>
+              </a:spcAft>
+            </a:pPr>
+            <a:r>
+              <a:rPr sz="1400" b="0">
+                <a:solidFill>
+                  <a:srgbClr val="333333"/>
+                </a:solidFill>
+                <a:latin typeface="Open Sans"/>
+                <a:ea typeface="Open Sans"/>
+                <a:cs typeface="Open Sans"/>
+              </a:rPr>
+              <a:t>•  Проверьте надежность иммобилизации до начала движения.</a:t>
+            </a:r>
+          </a:p>
+          <a:p>
+            <a:pPr algn="l">
+              <a:spcAft>
+                <a:spcPts val="800"/>
+              </a:spcAft>
+            </a:pPr>
+            <a:r>
+              <a:rPr sz="1400" b="0">
+                <a:solidFill>
+                  <a:srgbClr val="333333"/>
+                </a:solidFill>
+                <a:latin typeface="Open Sans"/>
+                <a:ea typeface="Open Sans"/>
+                <a:cs typeface="Open Sans"/>
+              </a:rPr>
+              <a:t>•  Не пытайтесь вправить деформацию для удобства размещения.</a:t>
+            </a:r>
+          </a:p>
+          <a:p>
+            <a:pPr algn="l">
+              <a:spcAft>
+                <a:spcPts val="800"/>
+              </a:spcAft>
+            </a:pPr>
+            <a:r>
+              <a:rPr sz="1400" b="0">
+                <a:solidFill>
+                  <a:srgbClr val="333333"/>
+                </a:solidFill>
+                <a:latin typeface="Open Sans"/>
+                <a:ea typeface="Open Sans"/>
+                <a:cs typeface="Open Sans"/>
+              </a:rPr>
+              <a:t>•  Оставьте пальцы поврежденной конечности доступными для наблюдения.</a:t>
+            </a:r>
+          </a:p>
+          <a:p>
+            <a:pPr algn="l">
+              <a:spcAft>
+                <a:spcPts val="800"/>
+              </a:spcAft>
+            </a:pPr>
+            <a:r>
+              <a:rPr sz="1400" b="0">
+                <a:solidFill>
+                  <a:srgbClr val="333333"/>
+                </a:solidFill>
+                <a:latin typeface="Open Sans"/>
+                <a:ea typeface="Open Sans"/>
+                <a:cs typeface="Open Sans"/>
+              </a:rPr>
+              <a:t>•  Регулярно оценивайте их цвет, температуру и чувствительность.</a:t>
+            </a:r>
+          </a:p>
+          <a:p>
+            <a:pPr algn="l">
+              <a:spcAft>
+                <a:spcPts val="800"/>
+              </a:spcAft>
+            </a:pPr>
+            <a:r>
+              <a:rPr sz="1400" b="0">
+                <a:solidFill>
+                  <a:srgbClr val="333333"/>
+                </a:solidFill>
+                <a:latin typeface="Open Sans"/>
+                <a:ea typeface="Open Sans"/>
+                <a:cs typeface="Open Sans"/>
+              </a:rPr>
+              <a:t>•  Следите, не пропиталась ли повязка кровью и не возобновилось ли кровотечение.</a:t>
+            </a:r>
+          </a:p>
+          <a:p>
+            <a:pPr algn="l">
+              <a:spcAft>
+                <a:spcPts val="800"/>
+              </a:spcAft>
+            </a:pPr>
+            <a:r>
+              <a:rPr sz="1400" b="0">
+                <a:solidFill>
+                  <a:srgbClr val="333333"/>
+                </a:solidFill>
+                <a:latin typeface="Open Sans"/>
+                <a:ea typeface="Open Sans"/>
+                <a:cs typeface="Open Sans"/>
+              </a:rPr>
+              <a:t>•  Не снимайте первоначальную повязку; при необходимости добавляйте материал сверху.</a:t>
+            </a:r>
+          </a:p>
+        </p:txBody>
+      </p:sp>
     </p:spTree>
   </p:cSld>
   <p:clrMapOvr>
